--- a/Leevi notes 3.pptx
+++ b/Leevi notes 3.pptx
@@ -158,7 +158,7 @@
           <inkml:channelProperty channel="F" name="resolution" value="0" units="1/dev"/>
         </inkml:channelProperties>
       </inkml:inkSource>
-      <inkml:timestamp xml:id="ts0" timeString="2026-03-29T19:13:11.990"/>
+      <inkml:timestamp xml:id="ts0" timeString="2026-03-29T19:13:13.362"/>
     </inkml:context>
     <inkml:brush xml:id="br0">
       <inkml:brushProperty name="width" value="0.025" units="cm"/>
@@ -166,39 +166,11 @@
       <inkml:brushProperty name="color" value="#E71224"/>
     </inkml:brush>
   </inkml:definitions>
-  <inkml:trace contextRef="#ctx0" brushRef="#br0">0 1 24575,'4'5'0,"-1"-1"0,0 1 0,1-1 0,0 0 0,0 0 0,1 0 0,-1 0 0,1-1 0,-1 0 0,1 0 0,0 0 0,8 3 0,65 22 0,6-10 0,0-4 0,1-3 0,149-1 0,2 0 0,475 19 0,-113-9 0,-5-9-224,-444-11-917,-137 0-5685</inkml:trace>
+  <inkml:trace contextRef="#ctx0" brushRef="#br0">0 258 24575,'1'6'0,"0"-1"0,0 1 0,1-1 0,0 1 0,0-1 0,0 0 0,1 1 0,-1-1 0,1 0 0,1-1 0,-1 1 0,1-1 0,-1 1 0,1-1 0,0 0 0,1 0 0,-1-1 0,1 1 0,0-1 0,-1 0 0,9 3 0,2 2 0,0-1 0,-1 0 0,2-1 0,-1-1 0,1 0 0,23 3 0,-25-6 0,1 0 0,-1-1 0,1 0 0,0-1 0,-1-1 0,1-1 0,18-3 0,-27 0 0,-1 1 0,0-1 0,0 1 0,-1-1 0,1-1 0,-1 1 0,0-1 0,-1 0 0,1 0 0,-1 0 0,4-10 0,8-13 0,-6 16 0,-1-1 0,0 0 0,-1 0 0,-1-1 0,0 0 0,-1 0 0,-1 0 0,0-1 0,-1 1 0,-1-1 0,0 0 0,-1 0 0,-2-18 0,0 20-114,1-23 357,0 36-295,1 0 1,-1 0-1,0 0 1,0 0-1,0 1 1,1-1-1,-1 0 1,0 0-1,1 0 1,-1 0-1,1 0 1,-1 0-1,1 0 1,-1 0-1,1 1 1,0-1-1,-1 0 1,1 1-1,0-1 1,0 0-1,0 1 1,-1-1-1,1 1 1,0-1-1,0 1 1,0-1-1,0 1 0,1-1 1,5 1-6775</inkml:trace>
 </inkml:ink>
 </file>
 
 <file path=ppt/ink/ink100.xml><?xml version="1.0" encoding="utf-8"?>
-<inkml:ink xmlns:inkml="http://www.w3.org/2003/InkML">
-  <inkml:definitions>
-    <inkml:context xml:id="ctx0">
-      <inkml:inkSource xml:id="inkSrc0">
-        <inkml:traceFormat>
-          <inkml:channel name="X" type="integer" min="-2.14748E9" max="2.14748E9" units="cm"/>
-          <inkml:channel name="Y" type="integer" min="-2.14748E9" max="2.14748E9" units="cm"/>
-          <inkml:channel name="F" type="integer" max="32767" units="dev"/>
-        </inkml:traceFormat>
-        <inkml:channelProperties>
-          <inkml:channelProperty channel="X" name="resolution" value="1000" units="1/cm"/>
-          <inkml:channelProperty channel="Y" name="resolution" value="1000" units="1/cm"/>
-          <inkml:channelProperty channel="F" name="resolution" value="0" units="1/dev"/>
-        </inkml:channelProperties>
-      </inkml:inkSource>
-      <inkml:timestamp xml:id="ts0" timeString="2026-03-29T20:17:47.809"/>
-    </inkml:context>
-    <inkml:brush xml:id="br0">
-      <inkml:brushProperty name="width" value="0.025" units="cm"/>
-      <inkml:brushProperty name="height" value="0.025" units="cm"/>
-      <inkml:brushProperty name="color" value="#E71224"/>
-    </inkml:brush>
-  </inkml:definitions>
-  <inkml:trace contextRef="#ctx0" brushRef="#br0">0 0 22663,'1084'26'0</inkml:trace>
-</inkml:ink>
-</file>
-
-<file path=ppt/ink/ink101.xml><?xml version="1.0" encoding="utf-8"?>
 <inkml:ink xmlns:inkml="http://www.w3.org/2003/InkML">
   <inkml:definitions>
     <inkml:context xml:id="ctx0">
@@ -226,7 +198,7 @@
 </inkml:ink>
 </file>
 
-<file path=ppt/ink/ink102.xml><?xml version="1.0" encoding="utf-8"?>
+<file path=ppt/ink/ink101.xml><?xml version="1.0" encoding="utf-8"?>
 <inkml:ink xmlns:inkml="http://www.w3.org/2003/InkML">
   <inkml:definitions>
     <inkml:context xml:id="ctx0">
@@ -254,7 +226,7 @@
 </inkml:ink>
 </file>
 
-<file path=ppt/ink/ink103.xml><?xml version="1.0" encoding="utf-8"?>
+<file path=ppt/ink/ink102.xml><?xml version="1.0" encoding="utf-8"?>
 <inkml:ink xmlns:inkml="http://www.w3.org/2003/InkML">
   <inkml:definitions>
     <inkml:context xml:id="ctx0">
@@ -282,7 +254,7 @@
 </inkml:ink>
 </file>
 
-<file path=ppt/ink/ink104.xml><?xml version="1.0" encoding="utf-8"?>
+<file path=ppt/ink/ink103.xml><?xml version="1.0" encoding="utf-8"?>
 <inkml:ink xmlns:inkml="http://www.w3.org/2003/InkML">
   <inkml:definitions>
     <inkml:context xml:id="ctx0">
@@ -310,7 +282,7 @@
 </inkml:ink>
 </file>
 
-<file path=ppt/ink/ink105.xml><?xml version="1.0" encoding="utf-8"?>
+<file path=ppt/ink/ink104.xml><?xml version="1.0" encoding="utf-8"?>
 <inkml:ink xmlns:inkml="http://www.w3.org/2003/InkML">
   <inkml:definitions>
     <inkml:context xml:id="ctx0">
@@ -338,7 +310,7 @@
 </inkml:ink>
 </file>
 
-<file path=ppt/ink/ink106.xml><?xml version="1.0" encoding="utf-8"?>
+<file path=ppt/ink/ink105.xml><?xml version="1.0" encoding="utf-8"?>
 <inkml:ink xmlns:inkml="http://www.w3.org/2003/InkML">
   <inkml:definitions>
     <inkml:context xml:id="ctx0">
@@ -366,7 +338,7 @@
 </inkml:ink>
 </file>
 
-<file path=ppt/ink/ink107.xml><?xml version="1.0" encoding="utf-8"?>
+<file path=ppt/ink/ink106.xml><?xml version="1.0" encoding="utf-8"?>
 <inkml:ink xmlns:inkml="http://www.w3.org/2003/InkML">
   <inkml:definitions>
     <inkml:context xml:id="ctx0">
@@ -394,7 +366,7 @@
 </inkml:ink>
 </file>
 
-<file path=ppt/ink/ink108.xml><?xml version="1.0" encoding="utf-8"?>
+<file path=ppt/ink/ink107.xml><?xml version="1.0" encoding="utf-8"?>
 <inkml:ink xmlns:inkml="http://www.w3.org/2003/InkML">
   <inkml:definitions>
     <inkml:context xml:id="ctx0">
@@ -422,7 +394,7 @@
 </inkml:ink>
 </file>
 
-<file path=ppt/ink/ink109.xml><?xml version="1.0" encoding="utf-8"?>
+<file path=ppt/ink/ink108.xml><?xml version="1.0" encoding="utf-8"?>
 <inkml:ink xmlns:inkml="http://www.w3.org/2003/InkML">
   <inkml:definitions>
     <inkml:context xml:id="ctx0">
@@ -450,35 +422,7 @@
 </inkml:ink>
 </file>
 
-<file path=ppt/ink/ink11.xml><?xml version="1.0" encoding="utf-8"?>
-<inkml:ink xmlns:inkml="http://www.w3.org/2003/InkML">
-  <inkml:definitions>
-    <inkml:context xml:id="ctx0">
-      <inkml:inkSource xml:id="inkSrc0">
-        <inkml:traceFormat>
-          <inkml:channel name="X" type="integer" min="-2.14748E9" max="2.14748E9" units="cm"/>
-          <inkml:channel name="Y" type="integer" min="-2.14748E9" max="2.14748E9" units="cm"/>
-          <inkml:channel name="F" type="integer" max="32767" units="dev"/>
-        </inkml:traceFormat>
-        <inkml:channelProperties>
-          <inkml:channelProperty channel="X" name="resolution" value="1000" units="1/cm"/>
-          <inkml:channelProperty channel="Y" name="resolution" value="1000" units="1/cm"/>
-          <inkml:channelProperty channel="F" name="resolution" value="0" units="1/dev"/>
-        </inkml:channelProperties>
-      </inkml:inkSource>
-      <inkml:timestamp xml:id="ts0" timeString="2026-03-29T19:13:13.362"/>
-    </inkml:context>
-    <inkml:brush xml:id="br0">
-      <inkml:brushProperty name="width" value="0.025" units="cm"/>
-      <inkml:brushProperty name="height" value="0.025" units="cm"/>
-      <inkml:brushProperty name="color" value="#E71224"/>
-    </inkml:brush>
-  </inkml:definitions>
-  <inkml:trace contextRef="#ctx0" brushRef="#br0">0 258 24575,'1'6'0,"0"-1"0,0 1 0,1-1 0,0 1 0,0-1 0,0 0 0,1 1 0,-1-1 0,1 0 0,1-1 0,-1 1 0,1-1 0,-1 1 0,1-1 0,0 0 0,1 0 0,-1-1 0,1 1 0,0-1 0,-1 0 0,9 3 0,2 2 0,0-1 0,-1 0 0,2-1 0,-1-1 0,1 0 0,23 3 0,-25-6 0,1 0 0,-1-1 0,1 0 0,0-1 0,-1-1 0,1-1 0,18-3 0,-27 0 0,-1 1 0,0-1 0,0 1 0,-1-1 0,1-1 0,-1 1 0,0-1 0,-1 0 0,1 0 0,-1 0 0,4-10 0,8-13 0,-6 16 0,-1-1 0,0 0 0,-1 0 0,-1-1 0,0 0 0,-1 0 0,-1 0 0,0-1 0,-1 1 0,-1-1 0,0 0 0,-1 0 0,-2-18 0,0 20-114,1-23 357,0 36-295,1 0 1,-1 0-1,0 0 1,0 0-1,0 1 1,1-1-1,-1 0 1,0 0-1,1 0 1,-1 0-1,1 0 1,-1 0-1,1 0 1,-1 0-1,1 1 1,0-1-1,-1 0 1,1 1-1,0-1 1,0 0-1,0 1 1,-1-1-1,1 1 1,0-1-1,0 1 1,0-1-1,0 1 0,1-1 1,5 1-6775</inkml:trace>
-</inkml:ink>
-</file>
-
-<file path=ppt/ink/ink110.xml><?xml version="1.0" encoding="utf-8"?>
+<file path=ppt/ink/ink109.xml><?xml version="1.0" encoding="utf-8"?>
 <inkml:ink xmlns:inkml="http://www.w3.org/2003/InkML">
   <inkml:definitions>
     <inkml:context xml:id="ctx0">
@@ -506,7 +450,35 @@
 </inkml:ink>
 </file>
 
-<file path=ppt/ink/ink111.xml><?xml version="1.0" encoding="utf-8"?>
+<file path=ppt/ink/ink11.xml><?xml version="1.0" encoding="utf-8"?>
+<inkml:ink xmlns:inkml="http://www.w3.org/2003/InkML">
+  <inkml:definitions>
+    <inkml:context xml:id="ctx0">
+      <inkml:inkSource xml:id="inkSrc0">
+        <inkml:traceFormat>
+          <inkml:channel name="X" type="integer" min="-2.14748E9" max="2.14748E9" units="cm"/>
+          <inkml:channel name="Y" type="integer" min="-2.14748E9" max="2.14748E9" units="cm"/>
+          <inkml:channel name="F" type="integer" max="32767" units="dev"/>
+        </inkml:traceFormat>
+        <inkml:channelProperties>
+          <inkml:channelProperty channel="X" name="resolution" value="1000" units="1/cm"/>
+          <inkml:channelProperty channel="Y" name="resolution" value="1000" units="1/cm"/>
+          <inkml:channelProperty channel="F" name="resolution" value="0" units="1/dev"/>
+        </inkml:channelProperties>
+      </inkml:inkSource>
+      <inkml:timestamp xml:id="ts0" timeString="2026-03-29T19:19:43.708"/>
+    </inkml:context>
+    <inkml:brush xml:id="br0">
+      <inkml:brushProperty name="width" value="0.025" units="cm"/>
+      <inkml:brushProperty name="height" value="0.025" units="cm"/>
+      <inkml:brushProperty name="color" value="#E71224"/>
+    </inkml:brush>
+  </inkml:definitions>
+  <inkml:trace contextRef="#ctx0" brushRef="#br0">0 0 24575,'2'10'0,"0"-2"0,0 1 0,1 0 0,0 0 0,1-1 0,0 0 0,0 1 0,8 9 0,6 14 0,-15-24 0,1-1 0,-1 0 0,2-1 0,-1 1 0,1-1 0,0 1 0,1-2 0,-1 1 0,1 0 0,0-1 0,0 0 0,1-1 0,0 1 0,0-1 0,0-1 0,0 1 0,8 2 0,4-1 0,-1-1 0,1 0 0,0-1 0,0-1 0,38-2 0,81 6 0,243 41 0,-132-12 0,-168-29 0,109-6 0,-109-2 0,111 10 0,133 6 0,-48-16 0,289 4 0,-102 7 0,-231 1 0,-98-2 0,49 14 0,-124-13 0,102 4 0,295-5 0,-401-7 0,-20 0 0,0 1 0,41 8 0,-39-5 0,0-2 0,1-1 0,55-5 0,-6 0 0,174 1 0,263 4 0,-365 17 0,-126-15 0,44 11 0,-49-9 0,32 4 0,39 10 0,-35 1 0,-1 2 0,101 53 0,-131-57 0,-1 1 0,-1 2 0,0 2 0,-2 0 0,-1 2 0,30 35 0,51 53 0,-69-75 0,-2 1 0,46 63 0,-48-42 0,31 66 0,-28-50 0,-6-22 0,-24-41 0,0 0 0,-2 1 0,0 0 0,0 0 0,6 22 0,-9-5-1365,-4-25-5461</inkml:trace>
+</inkml:ink>
+</file>
+
+<file path=ppt/ink/ink110.xml><?xml version="1.0" encoding="utf-8"?>
 <inkml:ink xmlns:inkml="http://www.w3.org/2003/InkML">
   <inkml:definitions>
     <inkml:context xml:id="ctx0">
@@ -534,7 +506,7 @@
 </inkml:ink>
 </file>
 
-<file path=ppt/ink/ink112.xml><?xml version="1.0" encoding="utf-8"?>
+<file path=ppt/ink/ink111.xml><?xml version="1.0" encoding="utf-8"?>
 <inkml:ink xmlns:inkml="http://www.w3.org/2003/InkML">
   <inkml:definitions>
     <inkml:context xml:id="ctx0">
@@ -562,7 +534,7 @@
 </inkml:ink>
 </file>
 
-<file path=ppt/ink/ink113.xml><?xml version="1.0" encoding="utf-8"?>
+<file path=ppt/ink/ink112.xml><?xml version="1.0" encoding="utf-8"?>
 <inkml:ink xmlns:inkml="http://www.w3.org/2003/InkML">
   <inkml:definitions>
     <inkml:context xml:id="ctx0">
@@ -590,7 +562,7 @@
 </inkml:ink>
 </file>
 
-<file path=ppt/ink/ink114.xml><?xml version="1.0" encoding="utf-8"?>
+<file path=ppt/ink/ink113.xml><?xml version="1.0" encoding="utf-8"?>
 <inkml:ink xmlns:inkml="http://www.w3.org/2003/InkML">
   <inkml:definitions>
     <inkml:context xml:id="ctx0">
@@ -618,7 +590,7 @@
 </inkml:ink>
 </file>
 
-<file path=ppt/ink/ink115.xml><?xml version="1.0" encoding="utf-8"?>
+<file path=ppt/ink/ink114.xml><?xml version="1.0" encoding="utf-8"?>
 <inkml:ink xmlns:inkml="http://www.w3.org/2003/InkML">
   <inkml:definitions>
     <inkml:context xml:id="ctx0">
@@ -646,7 +618,7 @@
 </inkml:ink>
 </file>
 
-<file path=ppt/ink/ink116.xml><?xml version="1.0" encoding="utf-8"?>
+<file path=ppt/ink/ink115.xml><?xml version="1.0" encoding="utf-8"?>
 <inkml:ink xmlns:inkml="http://www.w3.org/2003/InkML">
   <inkml:definitions>
     <inkml:context xml:id="ctx0">
@@ -674,7 +646,7 @@
 </inkml:ink>
 </file>
 
-<file path=ppt/ink/ink117.xml><?xml version="1.0" encoding="utf-8"?>
+<file path=ppt/ink/ink116.xml><?xml version="1.0" encoding="utf-8"?>
 <inkml:ink xmlns:inkml="http://www.w3.org/2003/InkML">
   <inkml:definitions>
     <inkml:context xml:id="ctx0">
@@ -702,7 +674,7 @@
 </inkml:ink>
 </file>
 
-<file path=ppt/ink/ink118.xml><?xml version="1.0" encoding="utf-8"?>
+<file path=ppt/ink/ink117.xml><?xml version="1.0" encoding="utf-8"?>
 <inkml:ink xmlns:inkml="http://www.w3.org/2003/InkML">
   <inkml:definitions>
     <inkml:context xml:id="ctx0">
@@ -730,7 +702,7 @@
 </inkml:ink>
 </file>
 
-<file path=ppt/ink/ink119.xml><?xml version="1.0" encoding="utf-8"?>
+<file path=ppt/ink/ink118.xml><?xml version="1.0" encoding="utf-8"?>
 <inkml:ink xmlns:inkml="http://www.w3.org/2003/InkML">
   <inkml:definitions>
     <inkml:context xml:id="ctx0">
@@ -758,35 +730,7 @@
 </inkml:ink>
 </file>
 
-<file path=ppt/ink/ink12.xml><?xml version="1.0" encoding="utf-8"?>
-<inkml:ink xmlns:inkml="http://www.w3.org/2003/InkML">
-  <inkml:definitions>
-    <inkml:context xml:id="ctx0">
-      <inkml:inkSource xml:id="inkSrc0">
-        <inkml:traceFormat>
-          <inkml:channel name="X" type="integer" min="-2.14748E9" max="2.14748E9" units="cm"/>
-          <inkml:channel name="Y" type="integer" min="-2.14748E9" max="2.14748E9" units="cm"/>
-          <inkml:channel name="F" type="integer" max="32767" units="dev"/>
-        </inkml:traceFormat>
-        <inkml:channelProperties>
-          <inkml:channelProperty channel="X" name="resolution" value="1000" units="1/cm"/>
-          <inkml:channelProperty channel="Y" name="resolution" value="1000" units="1/cm"/>
-          <inkml:channelProperty channel="F" name="resolution" value="0" units="1/dev"/>
-        </inkml:channelProperties>
-      </inkml:inkSource>
-      <inkml:timestamp xml:id="ts0" timeString="2026-03-29T19:19:43.708"/>
-    </inkml:context>
-    <inkml:brush xml:id="br0">
-      <inkml:brushProperty name="width" value="0.025" units="cm"/>
-      <inkml:brushProperty name="height" value="0.025" units="cm"/>
-      <inkml:brushProperty name="color" value="#E71224"/>
-    </inkml:brush>
-  </inkml:definitions>
-  <inkml:trace contextRef="#ctx0" brushRef="#br0">0 0 24575,'2'10'0,"0"-2"0,0 1 0,1 0 0,0 0 0,1-1 0,0 0 0,0 1 0,8 9 0,6 14 0,-15-24 0,1-1 0,-1 0 0,2-1 0,-1 1 0,1-1 0,0 1 0,1-2 0,-1 1 0,1 0 0,0-1 0,0 0 0,1-1 0,0 1 0,0-1 0,0-1 0,0 1 0,8 2 0,4-1 0,-1-1 0,1 0 0,0-1 0,0-1 0,38-2 0,81 6 0,243 41 0,-132-12 0,-168-29 0,109-6 0,-109-2 0,111 10 0,133 6 0,-48-16 0,289 4 0,-102 7 0,-231 1 0,-98-2 0,49 14 0,-124-13 0,102 4 0,295-5 0,-401-7 0,-20 0 0,0 1 0,41 8 0,-39-5 0,0-2 0,1-1 0,55-5 0,-6 0 0,174 1 0,263 4 0,-365 17 0,-126-15 0,44 11 0,-49-9 0,32 4 0,39 10 0,-35 1 0,-1 2 0,101 53 0,-131-57 0,-1 1 0,-1 2 0,0 2 0,-2 0 0,-1 2 0,30 35 0,51 53 0,-69-75 0,-2 1 0,46 63 0,-48-42 0,31 66 0,-28-50 0,-6-22 0,-24-41 0,0 0 0,-2 1 0,0 0 0,0 0 0,6 22 0,-9-5-1365,-4-25-5461</inkml:trace>
-</inkml:ink>
-</file>
-
-<file path=ppt/ink/ink120.xml><?xml version="1.0" encoding="utf-8"?>
+<file path=ppt/ink/ink119.xml><?xml version="1.0" encoding="utf-8"?>
 <inkml:ink xmlns:inkml="http://www.w3.org/2003/InkML">
   <inkml:definitions>
     <inkml:context xml:id="ctx0">
@@ -814,7 +758,35 @@
 </inkml:ink>
 </file>
 
-<file path=ppt/ink/ink121.xml><?xml version="1.0" encoding="utf-8"?>
+<file path=ppt/ink/ink12.xml><?xml version="1.0" encoding="utf-8"?>
+<inkml:ink xmlns:inkml="http://www.w3.org/2003/InkML">
+  <inkml:definitions>
+    <inkml:context xml:id="ctx0">
+      <inkml:inkSource xml:id="inkSrc0">
+        <inkml:traceFormat>
+          <inkml:channel name="X" type="integer" min="-2.14748E9" max="2.14748E9" units="cm"/>
+          <inkml:channel name="Y" type="integer" min="-2.14748E9" max="2.14748E9" units="cm"/>
+          <inkml:channel name="F" type="integer" max="32767" units="dev"/>
+        </inkml:traceFormat>
+        <inkml:channelProperties>
+          <inkml:channelProperty channel="X" name="resolution" value="1000" units="1/cm"/>
+          <inkml:channelProperty channel="Y" name="resolution" value="1000" units="1/cm"/>
+          <inkml:channelProperty channel="F" name="resolution" value="0" units="1/dev"/>
+        </inkml:channelProperties>
+      </inkml:inkSource>
+      <inkml:timestamp xml:id="ts0" timeString="2026-03-29T19:20:20.516"/>
+    </inkml:context>
+    <inkml:brush xml:id="br0">
+      <inkml:brushProperty name="width" value="0.025" units="cm"/>
+      <inkml:brushProperty name="height" value="0.025" units="cm"/>
+      <inkml:brushProperty name="color" value="#E71224"/>
+    </inkml:brush>
+  </inkml:definitions>
+  <inkml:trace contextRef="#ctx0" brushRef="#br0">0 1 24575,'1976'0'0,"-1727"20"0,8 0 0,1783-22 0,-1095 3 0,-915 2-1365,-19 0-5461</inkml:trace>
+</inkml:ink>
+</file>
+
+<file path=ppt/ink/ink120.xml><?xml version="1.0" encoding="utf-8"?>
 <inkml:ink xmlns:inkml="http://www.w3.org/2003/InkML">
   <inkml:definitions>
     <inkml:context xml:id="ctx0">
@@ -842,7 +814,7 @@
 </inkml:ink>
 </file>
 
-<file path=ppt/ink/ink122.xml><?xml version="1.0" encoding="utf-8"?>
+<file path=ppt/ink/ink121.xml><?xml version="1.0" encoding="utf-8"?>
 <inkml:ink xmlns:inkml="http://www.w3.org/2003/InkML">
   <inkml:definitions>
     <inkml:context xml:id="ctx0">
@@ -870,7 +842,7 @@
 </inkml:ink>
 </file>
 
-<file path=ppt/ink/ink123.xml><?xml version="1.0" encoding="utf-8"?>
+<file path=ppt/ink/ink122.xml><?xml version="1.0" encoding="utf-8"?>
 <inkml:ink xmlns:inkml="http://www.w3.org/2003/InkML">
   <inkml:definitions>
     <inkml:context xml:id="ctx0">
@@ -898,7 +870,7 @@
 </inkml:ink>
 </file>
 
-<file path=ppt/ink/ink124.xml><?xml version="1.0" encoding="utf-8"?>
+<file path=ppt/ink/ink123.xml><?xml version="1.0" encoding="utf-8"?>
 <inkml:ink xmlns:inkml="http://www.w3.org/2003/InkML">
   <inkml:definitions>
     <inkml:context xml:id="ctx0">
@@ -926,7 +898,7 @@
 </inkml:ink>
 </file>
 
-<file path=ppt/ink/ink125.xml><?xml version="1.0" encoding="utf-8"?>
+<file path=ppt/ink/ink124.xml><?xml version="1.0" encoding="utf-8"?>
 <inkml:ink xmlns:inkml="http://www.w3.org/2003/InkML">
   <inkml:definitions>
     <inkml:context xml:id="ctx0">
@@ -954,7 +926,7 @@
 </inkml:ink>
 </file>
 
-<file path=ppt/ink/ink126.xml><?xml version="1.0" encoding="utf-8"?>
+<file path=ppt/ink/ink125.xml><?xml version="1.0" encoding="utf-8"?>
 <inkml:ink xmlns:inkml="http://www.w3.org/2003/InkML">
   <inkml:definitions>
     <inkml:context xml:id="ctx0">
@@ -982,7 +954,7 @@
 </inkml:ink>
 </file>
 
-<file path=ppt/ink/ink127.xml><?xml version="1.0" encoding="utf-8"?>
+<file path=ppt/ink/ink126.xml><?xml version="1.0" encoding="utf-8"?>
 <inkml:ink xmlns:inkml="http://www.w3.org/2003/InkML">
   <inkml:definitions>
     <inkml:context xml:id="ctx0">
@@ -1010,7 +982,7 @@
 </inkml:ink>
 </file>
 
-<file path=ppt/ink/ink128.xml><?xml version="1.0" encoding="utf-8"?>
+<file path=ppt/ink/ink127.xml><?xml version="1.0" encoding="utf-8"?>
 <inkml:ink xmlns:inkml="http://www.w3.org/2003/InkML">
   <inkml:definitions>
     <inkml:context xml:id="ctx0">
@@ -1038,7 +1010,7 @@
 </inkml:ink>
 </file>
 
-<file path=ppt/ink/ink129.xml><?xml version="1.0" encoding="utf-8"?>
+<file path=ppt/ink/ink128.xml><?xml version="1.0" encoding="utf-8"?>
 <inkml:ink xmlns:inkml="http://www.w3.org/2003/InkML">
   <inkml:definitions>
     <inkml:context xml:id="ctx0">
@@ -1066,35 +1038,7 @@
 </inkml:ink>
 </file>
 
-<file path=ppt/ink/ink13.xml><?xml version="1.0" encoding="utf-8"?>
-<inkml:ink xmlns:inkml="http://www.w3.org/2003/InkML">
-  <inkml:definitions>
-    <inkml:context xml:id="ctx0">
-      <inkml:inkSource xml:id="inkSrc0">
-        <inkml:traceFormat>
-          <inkml:channel name="X" type="integer" min="-2.14748E9" max="2.14748E9" units="cm"/>
-          <inkml:channel name="Y" type="integer" min="-2.14748E9" max="2.14748E9" units="cm"/>
-          <inkml:channel name="F" type="integer" max="32767" units="dev"/>
-        </inkml:traceFormat>
-        <inkml:channelProperties>
-          <inkml:channelProperty channel="X" name="resolution" value="1000" units="1/cm"/>
-          <inkml:channelProperty channel="Y" name="resolution" value="1000" units="1/cm"/>
-          <inkml:channelProperty channel="F" name="resolution" value="0" units="1/dev"/>
-        </inkml:channelProperties>
-      </inkml:inkSource>
-      <inkml:timestamp xml:id="ts0" timeString="2026-03-29T19:20:20.516"/>
-    </inkml:context>
-    <inkml:brush xml:id="br0">
-      <inkml:brushProperty name="width" value="0.025" units="cm"/>
-      <inkml:brushProperty name="height" value="0.025" units="cm"/>
-      <inkml:brushProperty name="color" value="#E71224"/>
-    </inkml:brush>
-  </inkml:definitions>
-  <inkml:trace contextRef="#ctx0" brushRef="#br0">0 1 24575,'1976'0'0,"-1727"20"0,8 0 0,1783-22 0,-1095 3 0,-915 2-1365,-19 0-5461</inkml:trace>
-</inkml:ink>
-</file>
-
-<file path=ppt/ink/ink130.xml><?xml version="1.0" encoding="utf-8"?>
+<file path=ppt/ink/ink129.xml><?xml version="1.0" encoding="utf-8"?>
 <inkml:ink xmlns:inkml="http://www.w3.org/2003/InkML">
   <inkml:definitions>
     <inkml:context xml:id="ctx0">
@@ -1122,7 +1066,35 @@
 </inkml:ink>
 </file>
 
-<file path=ppt/ink/ink131.xml><?xml version="1.0" encoding="utf-8"?>
+<file path=ppt/ink/ink13.xml><?xml version="1.0" encoding="utf-8"?>
+<inkml:ink xmlns:inkml="http://www.w3.org/2003/InkML">
+  <inkml:definitions>
+    <inkml:context xml:id="ctx0">
+      <inkml:inkSource xml:id="inkSrc0">
+        <inkml:traceFormat>
+          <inkml:channel name="X" type="integer" min="-2.14748E9" max="2.14748E9" units="cm"/>
+          <inkml:channel name="Y" type="integer" min="-2.14748E9" max="2.14748E9" units="cm"/>
+          <inkml:channel name="F" type="integer" max="32767" units="dev"/>
+        </inkml:traceFormat>
+        <inkml:channelProperties>
+          <inkml:channelProperty channel="X" name="resolution" value="1000" units="1/cm"/>
+          <inkml:channelProperty channel="Y" name="resolution" value="1000" units="1/cm"/>
+          <inkml:channelProperty channel="F" name="resolution" value="0" units="1/dev"/>
+        </inkml:channelProperties>
+      </inkml:inkSource>
+      <inkml:timestamp xml:id="ts0" timeString="2026-03-29T19:21:05.537"/>
+    </inkml:context>
+    <inkml:brush xml:id="br0">
+      <inkml:brushProperty name="width" value="0.025" units="cm"/>
+      <inkml:brushProperty name="height" value="0.025" units="cm"/>
+      <inkml:brushProperty name="color" value="#E71224"/>
+    </inkml:brush>
+  </inkml:definitions>
+  <inkml:trace contextRef="#ctx0" brushRef="#br0">0 1 24575,'1355'0'0,"-1168"13"0,1 1 0,55-16 0,230 3 0,-352 4 0,146 3 0,32-8-1365,-284 0-5461</inkml:trace>
+</inkml:ink>
+</file>
+
+<file path=ppt/ink/ink130.xml><?xml version="1.0" encoding="utf-8"?>
 <inkml:ink xmlns:inkml="http://www.w3.org/2003/InkML">
   <inkml:definitions>
     <inkml:context xml:id="ctx0">
@@ -1150,7 +1122,7 @@
 </inkml:ink>
 </file>
 
-<file path=ppt/ink/ink132.xml><?xml version="1.0" encoding="utf-8"?>
+<file path=ppt/ink/ink131.xml><?xml version="1.0" encoding="utf-8"?>
 <inkml:ink xmlns:inkml="http://www.w3.org/2003/InkML">
   <inkml:definitions>
     <inkml:context xml:id="ctx0">
@@ -1178,7 +1150,7 @@
 </inkml:ink>
 </file>
 
-<file path=ppt/ink/ink133.xml><?xml version="1.0" encoding="utf-8"?>
+<file path=ppt/ink/ink132.xml><?xml version="1.0" encoding="utf-8"?>
 <inkml:ink xmlns:inkml="http://www.w3.org/2003/InkML">
   <inkml:definitions>
     <inkml:context xml:id="ctx0">
@@ -1222,34 +1194,6 @@
           <inkml:channelProperty channel="F" name="resolution" value="0" units="1/dev"/>
         </inkml:channelProperties>
       </inkml:inkSource>
-      <inkml:timestamp xml:id="ts0" timeString="2026-03-29T19:21:05.537"/>
-    </inkml:context>
-    <inkml:brush xml:id="br0">
-      <inkml:brushProperty name="width" value="0.025" units="cm"/>
-      <inkml:brushProperty name="height" value="0.025" units="cm"/>
-      <inkml:brushProperty name="color" value="#E71224"/>
-    </inkml:brush>
-  </inkml:definitions>
-  <inkml:trace contextRef="#ctx0" brushRef="#br0">0 1 24575,'1355'0'0,"-1168"13"0,1 1 0,55-16 0,230 3 0,-352 4 0,146 3 0,32-8-1365,-284 0-5461</inkml:trace>
-</inkml:ink>
-</file>
-
-<file path=ppt/ink/ink15.xml><?xml version="1.0" encoding="utf-8"?>
-<inkml:ink xmlns:inkml="http://www.w3.org/2003/InkML">
-  <inkml:definitions>
-    <inkml:context xml:id="ctx0">
-      <inkml:inkSource xml:id="inkSrc0">
-        <inkml:traceFormat>
-          <inkml:channel name="X" type="integer" min="-2.14748E9" max="2.14748E9" units="cm"/>
-          <inkml:channel name="Y" type="integer" min="-2.14748E9" max="2.14748E9" units="cm"/>
-          <inkml:channel name="F" type="integer" max="32767" units="dev"/>
-        </inkml:traceFormat>
-        <inkml:channelProperties>
-          <inkml:channelProperty channel="X" name="resolution" value="1000" units="1/cm"/>
-          <inkml:channelProperty channel="Y" name="resolution" value="1000" units="1/cm"/>
-          <inkml:channelProperty channel="F" name="resolution" value="0" units="1/dev"/>
-        </inkml:channelProperties>
-      </inkml:inkSource>
       <inkml:timestamp xml:id="ts0" timeString="2026-03-29T19:22:38.227"/>
     </inkml:context>
     <inkml:brush xml:id="br0">
@@ -1262,7 +1206,7 @@
 </inkml:ink>
 </file>
 
-<file path=ppt/ink/ink16.xml><?xml version="1.0" encoding="utf-8"?>
+<file path=ppt/ink/ink15.xml><?xml version="1.0" encoding="utf-8"?>
 <inkml:ink xmlns:inkml="http://www.w3.org/2003/InkML">
   <inkml:definitions>
     <inkml:context xml:id="ctx0">
@@ -1290,7 +1234,7 @@
 </inkml:ink>
 </file>
 
-<file path=ppt/ink/ink17.xml><?xml version="1.0" encoding="utf-8"?>
+<file path=ppt/ink/ink16.xml><?xml version="1.0" encoding="utf-8"?>
 <inkml:ink xmlns:inkml="http://www.w3.org/2003/InkML">
   <inkml:definitions>
     <inkml:context xml:id="ctx0">
@@ -1318,7 +1262,7 @@
 </inkml:ink>
 </file>
 
-<file path=ppt/ink/ink18.xml><?xml version="1.0" encoding="utf-8"?>
+<file path=ppt/ink/ink17.xml><?xml version="1.0" encoding="utf-8"?>
 <inkml:ink xmlns:inkml="http://www.w3.org/2003/InkML">
   <inkml:definitions>
     <inkml:context xml:id="ctx0">
@@ -1346,7 +1290,7 @@
 </inkml:ink>
 </file>
 
-<file path=ppt/ink/ink19.xml><?xml version="1.0" encoding="utf-8"?>
+<file path=ppt/ink/ink18.xml><?xml version="1.0" encoding="utf-8"?>
 <inkml:ink xmlns:inkml="http://www.w3.org/2003/InkML">
   <inkml:definitions>
     <inkml:context xml:id="ctx0">
@@ -1371,6 +1315,34 @@
     </inkml:brush>
   </inkml:definitions>
   <inkml:trace contextRef="#ctx0" brushRef="#br0">1 28 24575,'388'2'0,"397"-5"0,-635-10 0,28-1 0,1061 15 0,-1196 1 67,57 10-1,19 1-1564,-104-12-5328</inkml:trace>
+</inkml:ink>
+</file>
+
+<file path=ppt/ink/ink19.xml><?xml version="1.0" encoding="utf-8"?>
+<inkml:ink xmlns:inkml="http://www.w3.org/2003/InkML">
+  <inkml:definitions>
+    <inkml:context xml:id="ctx0">
+      <inkml:inkSource xml:id="inkSrc0">
+        <inkml:traceFormat>
+          <inkml:channel name="X" type="integer" min="-2.14748E9" max="2.14748E9" units="cm"/>
+          <inkml:channel name="Y" type="integer" min="-2.14748E9" max="2.14748E9" units="cm"/>
+          <inkml:channel name="F" type="integer" max="32767" units="dev"/>
+        </inkml:traceFormat>
+        <inkml:channelProperties>
+          <inkml:channelProperty channel="X" name="resolution" value="1000" units="1/cm"/>
+          <inkml:channelProperty channel="Y" name="resolution" value="1000" units="1/cm"/>
+          <inkml:channelProperty channel="F" name="resolution" value="0" units="1/dev"/>
+        </inkml:channelProperties>
+      </inkml:inkSource>
+      <inkml:timestamp xml:id="ts0" timeString="2026-03-29T19:29:59.593"/>
+    </inkml:context>
+    <inkml:brush xml:id="br0">
+      <inkml:brushProperty name="width" value="0.025" units="cm"/>
+      <inkml:brushProperty name="height" value="0.025" units="cm"/>
+      <inkml:brushProperty name="color" value="#E71224"/>
+    </inkml:brush>
+  </inkml:definitions>
+  <inkml:trace contextRef="#ctx0" brushRef="#br0">0 0 24159,'2315'0'0</inkml:trace>
 </inkml:ink>
 </file>
 
@@ -1418,34 +1390,6 @@
           <inkml:channelProperty channel="F" name="resolution" value="0" units="1/dev"/>
         </inkml:channelProperties>
       </inkml:inkSource>
-      <inkml:timestamp xml:id="ts0" timeString="2026-03-29T19:29:59.593"/>
-    </inkml:context>
-    <inkml:brush xml:id="br0">
-      <inkml:brushProperty name="width" value="0.025" units="cm"/>
-      <inkml:brushProperty name="height" value="0.025" units="cm"/>
-      <inkml:brushProperty name="color" value="#E71224"/>
-    </inkml:brush>
-  </inkml:definitions>
-  <inkml:trace contextRef="#ctx0" brushRef="#br0">0 0 24159,'2315'0'0</inkml:trace>
-</inkml:ink>
-</file>
-
-<file path=ppt/ink/ink21.xml><?xml version="1.0" encoding="utf-8"?>
-<inkml:ink xmlns:inkml="http://www.w3.org/2003/InkML">
-  <inkml:definitions>
-    <inkml:context xml:id="ctx0">
-      <inkml:inkSource xml:id="inkSrc0">
-        <inkml:traceFormat>
-          <inkml:channel name="X" type="integer" min="-2.14748E9" max="2.14748E9" units="cm"/>
-          <inkml:channel name="Y" type="integer" min="-2.14748E9" max="2.14748E9" units="cm"/>
-          <inkml:channel name="F" type="integer" max="32767" units="dev"/>
-        </inkml:traceFormat>
-        <inkml:channelProperties>
-          <inkml:channelProperty channel="X" name="resolution" value="1000" units="1/cm"/>
-          <inkml:channelProperty channel="Y" name="resolution" value="1000" units="1/cm"/>
-          <inkml:channelProperty channel="F" name="resolution" value="0" units="1/dev"/>
-        </inkml:channelProperties>
-      </inkml:inkSource>
       <inkml:timestamp xml:id="ts0" timeString="2026-03-29T19:30:02.824"/>
     </inkml:context>
     <inkml:brush xml:id="br0">
@@ -1458,7 +1402,7 @@
 </inkml:ink>
 </file>
 
-<file path=ppt/ink/ink22.xml><?xml version="1.0" encoding="utf-8"?>
+<file path=ppt/ink/ink21.xml><?xml version="1.0" encoding="utf-8"?>
 <inkml:ink xmlns:inkml="http://www.w3.org/2003/InkML">
   <inkml:definitions>
     <inkml:context xml:id="ctx0">
@@ -1486,7 +1430,7 @@
 </inkml:ink>
 </file>
 
-<file path=ppt/ink/ink23.xml><?xml version="1.0" encoding="utf-8"?>
+<file path=ppt/ink/ink22.xml><?xml version="1.0" encoding="utf-8"?>
 <inkml:ink xmlns:inkml="http://www.w3.org/2003/InkML">
   <inkml:definitions>
     <inkml:context xml:id="ctx0">
@@ -1514,7 +1458,7 @@
 </inkml:ink>
 </file>
 
-<file path=ppt/ink/ink24.xml><?xml version="1.0" encoding="utf-8"?>
+<file path=ppt/ink/ink23.xml><?xml version="1.0" encoding="utf-8"?>
 <inkml:ink xmlns:inkml="http://www.w3.org/2003/InkML">
   <inkml:definitions>
     <inkml:context xml:id="ctx0">
@@ -1542,7 +1486,7 @@
 </inkml:ink>
 </file>
 
-<file path=ppt/ink/ink25.xml><?xml version="1.0" encoding="utf-8"?>
+<file path=ppt/ink/ink24.xml><?xml version="1.0" encoding="utf-8"?>
 <inkml:ink xmlns:inkml="http://www.w3.org/2003/InkML">
   <inkml:definitions>
     <inkml:context xml:id="ctx0">
@@ -1570,7 +1514,7 @@
 </inkml:ink>
 </file>
 
-<file path=ppt/ink/ink26.xml><?xml version="1.0" encoding="utf-8"?>
+<file path=ppt/ink/ink25.xml><?xml version="1.0" encoding="utf-8"?>
 <inkml:ink xmlns:inkml="http://www.w3.org/2003/InkML">
   <inkml:definitions>
     <inkml:context xml:id="ctx0">
@@ -1598,7 +1542,7 @@
 </inkml:ink>
 </file>
 
-<file path=ppt/ink/ink27.xml><?xml version="1.0" encoding="utf-8"?>
+<file path=ppt/ink/ink26.xml><?xml version="1.0" encoding="utf-8"?>
 <inkml:ink xmlns:inkml="http://www.w3.org/2003/InkML">
   <inkml:definitions>
     <inkml:context xml:id="ctx0">
@@ -1626,7 +1570,7 @@
 </inkml:ink>
 </file>
 
-<file path=ppt/ink/ink28.xml><?xml version="1.0" encoding="utf-8"?>
+<file path=ppt/ink/ink27.xml><?xml version="1.0" encoding="utf-8"?>
 <inkml:ink xmlns:inkml="http://www.w3.org/2003/InkML">
   <inkml:definitions>
     <inkml:context xml:id="ctx0">
@@ -1654,7 +1598,7 @@
 </inkml:ink>
 </file>
 
-<file path=ppt/ink/ink29.xml><?xml version="1.0" encoding="utf-8"?>
+<file path=ppt/ink/ink28.xml><?xml version="1.0" encoding="utf-8"?>
 <inkml:ink xmlns:inkml="http://www.w3.org/2003/InkML">
   <inkml:definitions>
     <inkml:context xml:id="ctx0">
@@ -1679,6 +1623,34 @@
     </inkml:brush>
   </inkml:definitions>
   <inkml:trace contextRef="#ctx0" brushRef="#br0">1 11 24575,'903'0'0,"-835"-6"0,-52 4 0,1 0 0,-1 2 0,0-1 0,18 3 0,135 14-100,238-9 1,-255-8-1067,-140 1-5660</inkml:trace>
+</inkml:ink>
+</file>
+
+<file path=ppt/ink/ink29.xml><?xml version="1.0" encoding="utf-8"?>
+<inkml:ink xmlns:inkml="http://www.w3.org/2003/InkML">
+  <inkml:definitions>
+    <inkml:context xml:id="ctx0">
+      <inkml:inkSource xml:id="inkSrc0">
+        <inkml:traceFormat>
+          <inkml:channel name="X" type="integer" min="-2.14748E9" max="2.14748E9" units="cm"/>
+          <inkml:channel name="Y" type="integer" min="-2.14748E9" max="2.14748E9" units="cm"/>
+          <inkml:channel name="F" type="integer" max="32767" units="dev"/>
+        </inkml:traceFormat>
+        <inkml:channelProperties>
+          <inkml:channelProperty channel="X" name="resolution" value="1000" units="1/cm"/>
+          <inkml:channelProperty channel="Y" name="resolution" value="1000" units="1/cm"/>
+          <inkml:channelProperty channel="F" name="resolution" value="0" units="1/dev"/>
+        </inkml:channelProperties>
+      </inkml:inkSource>
+      <inkml:timestamp xml:id="ts0" timeString="2026-03-29T19:34:58.051"/>
+    </inkml:context>
+    <inkml:brush xml:id="br0">
+      <inkml:brushProperty name="width" value="0.025" units="cm"/>
+      <inkml:brushProperty name="height" value="0.025" units="cm"/>
+      <inkml:brushProperty name="color" value="#E71224"/>
+    </inkml:brush>
+  </inkml:definitions>
+  <inkml:trace contextRef="#ctx0" brushRef="#br0">1 29 24575,'26'-1'0,"51"-10"0,6 0 0,543 5 0,-348 9 0,6043-3 0,-5970 13 0,20 1 0,-324-15 0,654 21 0,-36 13 0,-447-33-1365,-207 0-5461</inkml:trace>
 </inkml:ink>
 </file>
 
@@ -1726,34 +1698,6 @@
           <inkml:channelProperty channel="F" name="resolution" value="0" units="1/dev"/>
         </inkml:channelProperties>
       </inkml:inkSource>
-      <inkml:timestamp xml:id="ts0" timeString="2026-03-29T19:34:58.051"/>
-    </inkml:context>
-    <inkml:brush xml:id="br0">
-      <inkml:brushProperty name="width" value="0.025" units="cm"/>
-      <inkml:brushProperty name="height" value="0.025" units="cm"/>
-      <inkml:brushProperty name="color" value="#E71224"/>
-    </inkml:brush>
-  </inkml:definitions>
-  <inkml:trace contextRef="#ctx0" brushRef="#br0">1 29 24575,'26'-1'0,"51"-10"0,6 0 0,543 5 0,-348 9 0,6043-3 0,-5970 13 0,20 1 0,-324-15 0,654 21 0,-36 13 0,-447-33-1365,-207 0-5461</inkml:trace>
-</inkml:ink>
-</file>
-
-<file path=ppt/ink/ink31.xml><?xml version="1.0" encoding="utf-8"?>
-<inkml:ink xmlns:inkml="http://www.w3.org/2003/InkML">
-  <inkml:definitions>
-    <inkml:context xml:id="ctx0">
-      <inkml:inkSource xml:id="inkSrc0">
-        <inkml:traceFormat>
-          <inkml:channel name="X" type="integer" min="-2.14748E9" max="2.14748E9" units="cm"/>
-          <inkml:channel name="Y" type="integer" min="-2.14748E9" max="2.14748E9" units="cm"/>
-          <inkml:channel name="F" type="integer" max="32767" units="dev"/>
-        </inkml:traceFormat>
-        <inkml:channelProperties>
-          <inkml:channelProperty channel="X" name="resolution" value="1000" units="1/cm"/>
-          <inkml:channelProperty channel="Y" name="resolution" value="1000" units="1/cm"/>
-          <inkml:channelProperty channel="F" name="resolution" value="0" units="1/dev"/>
-        </inkml:channelProperties>
-      </inkml:inkSource>
       <inkml:timestamp xml:id="ts0" timeString="2026-03-29T19:39:30.294"/>
     </inkml:context>
     <inkml:brush xml:id="br0">
@@ -1766,7 +1710,7 @@
 </inkml:ink>
 </file>
 
-<file path=ppt/ink/ink32.xml><?xml version="1.0" encoding="utf-8"?>
+<file path=ppt/ink/ink31.xml><?xml version="1.0" encoding="utf-8"?>
 <inkml:ink xmlns:inkml="http://www.w3.org/2003/InkML">
   <inkml:definitions>
     <inkml:context xml:id="ctx0">
@@ -1794,7 +1738,7 @@
 </inkml:ink>
 </file>
 
-<file path=ppt/ink/ink33.xml><?xml version="1.0" encoding="utf-8"?>
+<file path=ppt/ink/ink32.xml><?xml version="1.0" encoding="utf-8"?>
 <inkml:ink xmlns:inkml="http://www.w3.org/2003/InkML">
   <inkml:definitions>
     <inkml:context xml:id="ctx0">
@@ -1822,7 +1766,7 @@
 </inkml:ink>
 </file>
 
-<file path=ppt/ink/ink34.xml><?xml version="1.0" encoding="utf-8"?>
+<file path=ppt/ink/ink33.xml><?xml version="1.0" encoding="utf-8"?>
 <inkml:ink xmlns:inkml="http://www.w3.org/2003/InkML">
   <inkml:definitions>
     <inkml:context xml:id="ctx0">
@@ -1850,7 +1794,7 @@
 </inkml:ink>
 </file>
 
-<file path=ppt/ink/ink35.xml><?xml version="1.0" encoding="utf-8"?>
+<file path=ppt/ink/ink34.xml><?xml version="1.0" encoding="utf-8"?>
 <inkml:ink xmlns:inkml="http://www.w3.org/2003/InkML">
   <inkml:definitions>
     <inkml:context xml:id="ctx0">
@@ -1878,7 +1822,7 @@
 </inkml:ink>
 </file>
 
-<file path=ppt/ink/ink36.xml><?xml version="1.0" encoding="utf-8"?>
+<file path=ppt/ink/ink35.xml><?xml version="1.0" encoding="utf-8"?>
 <inkml:ink xmlns:inkml="http://www.w3.org/2003/InkML">
   <inkml:definitions>
     <inkml:context xml:id="ctx0">
@@ -1906,7 +1850,7 @@
 </inkml:ink>
 </file>
 
-<file path=ppt/ink/ink37.xml><?xml version="1.0" encoding="utf-8"?>
+<file path=ppt/ink/ink36.xml><?xml version="1.0" encoding="utf-8"?>
 <inkml:ink xmlns:inkml="http://www.w3.org/2003/InkML">
   <inkml:definitions>
     <inkml:context xml:id="ctx0">
@@ -1934,7 +1878,7 @@
 </inkml:ink>
 </file>
 
-<file path=ppt/ink/ink38.xml><?xml version="1.0" encoding="utf-8"?>
+<file path=ppt/ink/ink37.xml><?xml version="1.0" encoding="utf-8"?>
 <inkml:ink xmlns:inkml="http://www.w3.org/2003/InkML">
   <inkml:definitions>
     <inkml:context xml:id="ctx0">
@@ -1962,7 +1906,7 @@
 </inkml:ink>
 </file>
 
-<file path=ppt/ink/ink39.xml><?xml version="1.0" encoding="utf-8"?>
+<file path=ppt/ink/ink38.xml><?xml version="1.0" encoding="utf-8"?>
 <inkml:ink xmlns:inkml="http://www.w3.org/2003/InkML">
   <inkml:definitions>
     <inkml:context xml:id="ctx0">
@@ -1990,35 +1934,7 @@
 </inkml:ink>
 </file>
 
-<file path=ppt/ink/ink4.xml><?xml version="1.0" encoding="utf-8"?>
-<inkml:ink xmlns:inkml="http://www.w3.org/2003/InkML">
-  <inkml:definitions>
-    <inkml:context xml:id="ctx0">
-      <inkml:inkSource xml:id="inkSrc0">
-        <inkml:traceFormat>
-          <inkml:channel name="X" type="integer" min="-2.14748E9" max="2.14748E9" units="cm"/>
-          <inkml:channel name="Y" type="integer" min="-2.14748E9" max="2.14748E9" units="cm"/>
-          <inkml:channel name="F" type="integer" max="32767" units="dev"/>
-        </inkml:traceFormat>
-        <inkml:channelProperties>
-          <inkml:channelProperty channel="X" name="resolution" value="1000" units="1/cm"/>
-          <inkml:channelProperty channel="Y" name="resolution" value="1000" units="1/cm"/>
-          <inkml:channelProperty channel="F" name="resolution" value="0" units="1/dev"/>
-        </inkml:channelProperties>
-      </inkml:inkSource>
-      <inkml:timestamp xml:id="ts0" timeString="2026-03-29T19:14:38.073"/>
-    </inkml:context>
-    <inkml:brush xml:id="br0">
-      <inkml:brushProperty name="width" value="0.025" units="cm"/>
-      <inkml:brushProperty name="height" value="0.025" units="cm"/>
-      <inkml:brushProperty name="color" value="#E71224"/>
-    </inkml:brush>
-  </inkml:definitions>
-  <inkml:trace contextRef="#ctx0" brushRef="#br0">1 17 24575,'120'-17'0,"109"22"78,-113-1-1521,-106-4-5383</inkml:trace>
-</inkml:ink>
-</file>
-
-<file path=ppt/ink/ink40.xml><?xml version="1.0" encoding="utf-8"?>
+<file path=ppt/ink/ink39.xml><?xml version="1.0" encoding="utf-8"?>
 <inkml:ink xmlns:inkml="http://www.w3.org/2003/InkML">
   <inkml:definitions>
     <inkml:context xml:id="ctx0">
@@ -2046,7 +1962,35 @@
 </inkml:ink>
 </file>
 
-<file path=ppt/ink/ink41.xml><?xml version="1.0" encoding="utf-8"?>
+<file path=ppt/ink/ink4.xml><?xml version="1.0" encoding="utf-8"?>
+<inkml:ink xmlns:inkml="http://www.w3.org/2003/InkML">
+  <inkml:definitions>
+    <inkml:context xml:id="ctx0">
+      <inkml:inkSource xml:id="inkSrc0">
+        <inkml:traceFormat>
+          <inkml:channel name="X" type="integer" min="-2.14748E9" max="2.14748E9" units="cm"/>
+          <inkml:channel name="Y" type="integer" min="-2.14748E9" max="2.14748E9" units="cm"/>
+          <inkml:channel name="F" type="integer" max="32767" units="dev"/>
+        </inkml:traceFormat>
+        <inkml:channelProperties>
+          <inkml:channelProperty channel="X" name="resolution" value="1000" units="1/cm"/>
+          <inkml:channelProperty channel="Y" name="resolution" value="1000" units="1/cm"/>
+          <inkml:channelProperty channel="F" name="resolution" value="0" units="1/dev"/>
+        </inkml:channelProperties>
+      </inkml:inkSource>
+      <inkml:timestamp xml:id="ts0" timeString="2026-03-29T19:15:44.724"/>
+    </inkml:context>
+    <inkml:brush xml:id="br0">
+      <inkml:brushProperty name="width" value="0.025" units="cm"/>
+      <inkml:brushProperty name="height" value="0.025" units="cm"/>
+      <inkml:brushProperty name="color" value="#E71224"/>
+    </inkml:brush>
+  </inkml:definitions>
+  <inkml:trace contextRef="#ctx0" brushRef="#br0">0 2 24575,'150'-2'0,"175"6"0,-233 8 0,-61-7 0,0-1 0,33 0 0,64-5-1365,-120 1-5461</inkml:trace>
+</inkml:ink>
+</file>
+
+<file path=ppt/ink/ink40.xml><?xml version="1.0" encoding="utf-8"?>
 <inkml:ink xmlns:inkml="http://www.w3.org/2003/InkML">
   <inkml:definitions>
     <inkml:context xml:id="ctx0">
@@ -2074,7 +2018,7 @@
 </inkml:ink>
 </file>
 
-<file path=ppt/ink/ink42.xml><?xml version="1.0" encoding="utf-8"?>
+<file path=ppt/ink/ink41.xml><?xml version="1.0" encoding="utf-8"?>
 <inkml:ink xmlns:inkml="http://www.w3.org/2003/InkML">
   <inkml:definitions>
     <inkml:context xml:id="ctx0">
@@ -2102,7 +2046,7 @@
 </inkml:ink>
 </file>
 
-<file path=ppt/ink/ink43.xml><?xml version="1.0" encoding="utf-8"?>
+<file path=ppt/ink/ink42.xml><?xml version="1.0" encoding="utf-8"?>
 <inkml:ink xmlns:inkml="http://www.w3.org/2003/InkML">
   <inkml:definitions>
     <inkml:context xml:id="ctx0">
@@ -2130,7 +2074,7 @@
 </inkml:ink>
 </file>
 
-<file path=ppt/ink/ink44.xml><?xml version="1.0" encoding="utf-8"?>
+<file path=ppt/ink/ink43.xml><?xml version="1.0" encoding="utf-8"?>
 <inkml:ink xmlns:inkml="http://www.w3.org/2003/InkML">
   <inkml:definitions>
     <inkml:context xml:id="ctx0">
@@ -2158,7 +2102,7 @@
 </inkml:ink>
 </file>
 
-<file path=ppt/ink/ink45.xml><?xml version="1.0" encoding="utf-8"?>
+<file path=ppt/ink/ink44.xml><?xml version="1.0" encoding="utf-8"?>
 <inkml:ink xmlns:inkml="http://www.w3.org/2003/InkML">
   <inkml:definitions>
     <inkml:context xml:id="ctx0">
@@ -2186,7 +2130,7 @@
 </inkml:ink>
 </file>
 
-<file path=ppt/ink/ink46.xml><?xml version="1.0" encoding="utf-8"?>
+<file path=ppt/ink/ink45.xml><?xml version="1.0" encoding="utf-8"?>
 <inkml:ink xmlns:inkml="http://www.w3.org/2003/InkML">
   <inkml:definitions>
     <inkml:context xml:id="ctx0">
@@ -2214,7 +2158,7 @@
 </inkml:ink>
 </file>
 
-<file path=ppt/ink/ink47.xml><?xml version="1.0" encoding="utf-8"?>
+<file path=ppt/ink/ink46.xml><?xml version="1.0" encoding="utf-8"?>
 <inkml:ink xmlns:inkml="http://www.w3.org/2003/InkML">
   <inkml:definitions>
     <inkml:context xml:id="ctx0">
@@ -2242,7 +2186,7 @@
 </inkml:ink>
 </file>
 
-<file path=ppt/ink/ink48.xml><?xml version="1.0" encoding="utf-8"?>
+<file path=ppt/ink/ink47.xml><?xml version="1.0" encoding="utf-8"?>
 <inkml:ink xmlns:inkml="http://www.w3.org/2003/InkML">
   <inkml:definitions>
     <inkml:context xml:id="ctx0">
@@ -2270,7 +2214,7 @@
 </inkml:ink>
 </file>
 
-<file path=ppt/ink/ink49.xml><?xml version="1.0" encoding="utf-8"?>
+<file path=ppt/ink/ink48.xml><?xml version="1.0" encoding="utf-8"?>
 <inkml:ink xmlns:inkml="http://www.w3.org/2003/InkML">
   <inkml:definitions>
     <inkml:context xml:id="ctx0">
@@ -2298,35 +2242,7 @@
 </inkml:ink>
 </file>
 
-<file path=ppt/ink/ink5.xml><?xml version="1.0" encoding="utf-8"?>
-<inkml:ink xmlns:inkml="http://www.w3.org/2003/InkML">
-  <inkml:definitions>
-    <inkml:context xml:id="ctx0">
-      <inkml:inkSource xml:id="inkSrc0">
-        <inkml:traceFormat>
-          <inkml:channel name="X" type="integer" min="-2.14748E9" max="2.14748E9" units="cm"/>
-          <inkml:channel name="Y" type="integer" min="-2.14748E9" max="2.14748E9" units="cm"/>
-          <inkml:channel name="F" type="integer" max="32767" units="dev"/>
-        </inkml:traceFormat>
-        <inkml:channelProperties>
-          <inkml:channelProperty channel="X" name="resolution" value="1000" units="1/cm"/>
-          <inkml:channelProperty channel="Y" name="resolution" value="1000" units="1/cm"/>
-          <inkml:channelProperty channel="F" name="resolution" value="0" units="1/dev"/>
-        </inkml:channelProperties>
-      </inkml:inkSource>
-      <inkml:timestamp xml:id="ts0" timeString="2026-03-29T19:15:44.724"/>
-    </inkml:context>
-    <inkml:brush xml:id="br0">
-      <inkml:brushProperty name="width" value="0.025" units="cm"/>
-      <inkml:brushProperty name="height" value="0.025" units="cm"/>
-      <inkml:brushProperty name="color" value="#E71224"/>
-    </inkml:brush>
-  </inkml:definitions>
-  <inkml:trace contextRef="#ctx0" brushRef="#br0">0 2 24575,'150'-2'0,"175"6"0,-233 8 0,-61-7 0,0-1 0,33 0 0,64-5-1365,-120 1-5461</inkml:trace>
-</inkml:ink>
-</file>
-
-<file path=ppt/ink/ink50.xml><?xml version="1.0" encoding="utf-8"?>
+<file path=ppt/ink/ink49.xml><?xml version="1.0" encoding="utf-8"?>
 <inkml:ink xmlns:inkml="http://www.w3.org/2003/InkML">
   <inkml:definitions>
     <inkml:context xml:id="ctx0">
@@ -2354,7 +2270,35 @@
 </inkml:ink>
 </file>
 
-<file path=ppt/ink/ink51.xml><?xml version="1.0" encoding="utf-8"?>
+<file path=ppt/ink/ink5.xml><?xml version="1.0" encoding="utf-8"?>
+<inkml:ink xmlns:inkml="http://www.w3.org/2003/InkML">
+  <inkml:definitions>
+    <inkml:context xml:id="ctx0">
+      <inkml:inkSource xml:id="inkSrc0">
+        <inkml:traceFormat>
+          <inkml:channel name="X" type="integer" min="-2.14748E9" max="2.14748E9" units="cm"/>
+          <inkml:channel name="Y" type="integer" min="-2.14748E9" max="2.14748E9" units="cm"/>
+          <inkml:channel name="F" type="integer" max="32767" units="dev"/>
+        </inkml:traceFormat>
+        <inkml:channelProperties>
+          <inkml:channelProperty channel="X" name="resolution" value="1000" units="1/cm"/>
+          <inkml:channelProperty channel="Y" name="resolution" value="1000" units="1/cm"/>
+          <inkml:channelProperty channel="F" name="resolution" value="0" units="1/dev"/>
+        </inkml:channelProperties>
+      </inkml:inkSource>
+      <inkml:timestamp xml:id="ts0" timeString="2026-03-29T19:16:16.036"/>
+    </inkml:context>
+    <inkml:brush xml:id="br0">
+      <inkml:brushProperty name="width" value="0.025" units="cm"/>
+      <inkml:brushProperty name="height" value="0.025" units="cm"/>
+      <inkml:brushProperty name="color" value="#E71224"/>
+    </inkml:brush>
+  </inkml:definitions>
+  <inkml:trace contextRef="#ctx0" brushRef="#br0">0 0 23619,'2550'0'0</inkml:trace>
+</inkml:ink>
+</file>
+
+<file path=ppt/ink/ink50.xml><?xml version="1.0" encoding="utf-8"?>
 <inkml:ink xmlns:inkml="http://www.w3.org/2003/InkML">
   <inkml:definitions>
     <inkml:context xml:id="ctx0">
@@ -2382,7 +2326,7 @@
 </inkml:ink>
 </file>
 
-<file path=ppt/ink/ink52.xml><?xml version="1.0" encoding="utf-8"?>
+<file path=ppt/ink/ink51.xml><?xml version="1.0" encoding="utf-8"?>
 <inkml:ink xmlns:inkml="http://www.w3.org/2003/InkML">
   <inkml:definitions>
     <inkml:context xml:id="ctx0">
@@ -2410,7 +2354,7 @@
 </inkml:ink>
 </file>
 
-<file path=ppt/ink/ink53.xml><?xml version="1.0" encoding="utf-8"?>
+<file path=ppt/ink/ink52.xml><?xml version="1.0" encoding="utf-8"?>
 <inkml:ink xmlns:inkml="http://www.w3.org/2003/InkML">
   <inkml:definitions>
     <inkml:context xml:id="ctx0">
@@ -2438,7 +2382,7 @@
 </inkml:ink>
 </file>
 
-<file path=ppt/ink/ink54.xml><?xml version="1.0" encoding="utf-8"?>
+<file path=ppt/ink/ink53.xml><?xml version="1.0" encoding="utf-8"?>
 <inkml:ink xmlns:inkml="http://www.w3.org/2003/InkML">
   <inkml:definitions>
     <inkml:context xml:id="ctx0">
@@ -2466,7 +2410,7 @@
 </inkml:ink>
 </file>
 
-<file path=ppt/ink/ink55.xml><?xml version="1.0" encoding="utf-8"?>
+<file path=ppt/ink/ink54.xml><?xml version="1.0" encoding="utf-8"?>
 <inkml:ink xmlns:inkml="http://www.w3.org/2003/InkML">
   <inkml:definitions>
     <inkml:context xml:id="ctx0">
@@ -2494,7 +2438,7 @@
 </inkml:ink>
 </file>
 
-<file path=ppt/ink/ink56.xml><?xml version="1.0" encoding="utf-8"?>
+<file path=ppt/ink/ink55.xml><?xml version="1.0" encoding="utf-8"?>
 <inkml:ink xmlns:inkml="http://www.w3.org/2003/InkML">
   <inkml:definitions>
     <inkml:context xml:id="ctx0">
@@ -2522,7 +2466,7 @@
 </inkml:ink>
 </file>
 
-<file path=ppt/ink/ink57.xml><?xml version="1.0" encoding="utf-8"?>
+<file path=ppt/ink/ink56.xml><?xml version="1.0" encoding="utf-8"?>
 <inkml:ink xmlns:inkml="http://www.w3.org/2003/InkML">
   <inkml:definitions>
     <inkml:context xml:id="ctx0">
@@ -2550,7 +2494,7 @@
 </inkml:ink>
 </file>
 
-<file path=ppt/ink/ink58.xml><?xml version="1.0" encoding="utf-8"?>
+<file path=ppt/ink/ink57.xml><?xml version="1.0" encoding="utf-8"?>
 <inkml:ink xmlns:inkml="http://www.w3.org/2003/InkML">
   <inkml:definitions>
     <inkml:context xml:id="ctx0">
@@ -2578,7 +2522,7 @@
 </inkml:ink>
 </file>
 
-<file path=ppt/ink/ink59.xml><?xml version="1.0" encoding="utf-8"?>
+<file path=ppt/ink/ink58.xml><?xml version="1.0" encoding="utf-8"?>
 <inkml:ink xmlns:inkml="http://www.w3.org/2003/InkML">
   <inkml:definitions>
     <inkml:context xml:id="ctx0">
@@ -2606,35 +2550,7 @@
 </inkml:ink>
 </file>
 
-<file path=ppt/ink/ink6.xml><?xml version="1.0" encoding="utf-8"?>
-<inkml:ink xmlns:inkml="http://www.w3.org/2003/InkML">
-  <inkml:definitions>
-    <inkml:context xml:id="ctx0">
-      <inkml:inkSource xml:id="inkSrc0">
-        <inkml:traceFormat>
-          <inkml:channel name="X" type="integer" min="-2.14748E9" max="2.14748E9" units="cm"/>
-          <inkml:channel name="Y" type="integer" min="-2.14748E9" max="2.14748E9" units="cm"/>
-          <inkml:channel name="F" type="integer" max="32767" units="dev"/>
-        </inkml:traceFormat>
-        <inkml:channelProperties>
-          <inkml:channelProperty channel="X" name="resolution" value="1000" units="1/cm"/>
-          <inkml:channelProperty channel="Y" name="resolution" value="1000" units="1/cm"/>
-          <inkml:channelProperty channel="F" name="resolution" value="0" units="1/dev"/>
-        </inkml:channelProperties>
-      </inkml:inkSource>
-      <inkml:timestamp xml:id="ts0" timeString="2026-03-29T19:16:16.036"/>
-    </inkml:context>
-    <inkml:brush xml:id="br0">
-      <inkml:brushProperty name="width" value="0.025" units="cm"/>
-      <inkml:brushProperty name="height" value="0.025" units="cm"/>
-      <inkml:brushProperty name="color" value="#E71224"/>
-    </inkml:brush>
-  </inkml:definitions>
-  <inkml:trace contextRef="#ctx0" brushRef="#br0">0 0 23619,'2550'0'0</inkml:trace>
-</inkml:ink>
-</file>
-
-<file path=ppt/ink/ink60.xml><?xml version="1.0" encoding="utf-8"?>
+<file path=ppt/ink/ink59.xml><?xml version="1.0" encoding="utf-8"?>
 <inkml:ink xmlns:inkml="http://www.w3.org/2003/InkML">
   <inkml:definitions>
     <inkml:context xml:id="ctx0">
@@ -2662,7 +2578,35 @@
 </inkml:ink>
 </file>
 
-<file path=ppt/ink/ink61.xml><?xml version="1.0" encoding="utf-8"?>
+<file path=ppt/ink/ink6.xml><?xml version="1.0" encoding="utf-8"?>
+<inkml:ink xmlns:inkml="http://www.w3.org/2003/InkML">
+  <inkml:definitions>
+    <inkml:context xml:id="ctx0">
+      <inkml:inkSource xml:id="inkSrc0">
+        <inkml:traceFormat>
+          <inkml:channel name="X" type="integer" min="-2.14748E9" max="2.14748E9" units="cm"/>
+          <inkml:channel name="Y" type="integer" min="-2.14748E9" max="2.14748E9" units="cm"/>
+          <inkml:channel name="F" type="integer" max="32767" units="dev"/>
+        </inkml:traceFormat>
+        <inkml:channelProperties>
+          <inkml:channelProperty channel="X" name="resolution" value="1000" units="1/cm"/>
+          <inkml:channelProperty channel="Y" name="resolution" value="1000" units="1/cm"/>
+          <inkml:channelProperty channel="F" name="resolution" value="0" units="1/dev"/>
+        </inkml:channelProperties>
+      </inkml:inkSource>
+      <inkml:timestamp xml:id="ts0" timeString="2026-03-29T19:18:19.777"/>
+    </inkml:context>
+    <inkml:brush xml:id="br0">
+      <inkml:brushProperty name="width" value="0.025" units="cm"/>
+      <inkml:brushProperty name="height" value="0.025" units="cm"/>
+      <inkml:brushProperty name="color" value="#E71224"/>
+    </inkml:brush>
+  </inkml:definitions>
+  <inkml:trace contextRef="#ctx0" brushRef="#br0">0 0 23609,'5195'0'0</inkml:trace>
+</inkml:ink>
+</file>
+
+<file path=ppt/ink/ink60.xml><?xml version="1.0" encoding="utf-8"?>
 <inkml:ink xmlns:inkml="http://www.w3.org/2003/InkML">
   <inkml:definitions>
     <inkml:context xml:id="ctx0">
@@ -2690,7 +2634,7 @@
 </inkml:ink>
 </file>
 
-<file path=ppt/ink/ink62.xml><?xml version="1.0" encoding="utf-8"?>
+<file path=ppt/ink/ink61.xml><?xml version="1.0" encoding="utf-8"?>
 <inkml:ink xmlns:inkml="http://www.w3.org/2003/InkML">
   <inkml:definitions>
     <inkml:context xml:id="ctx0">
@@ -2718,7 +2662,7 @@
 </inkml:ink>
 </file>
 
-<file path=ppt/ink/ink63.xml><?xml version="1.0" encoding="utf-8"?>
+<file path=ppt/ink/ink62.xml><?xml version="1.0" encoding="utf-8"?>
 <inkml:ink xmlns:inkml="http://www.w3.org/2003/InkML">
   <inkml:definitions>
     <inkml:context xml:id="ctx0">
@@ -2746,7 +2690,7 @@
 </inkml:ink>
 </file>
 
-<file path=ppt/ink/ink64.xml><?xml version="1.0" encoding="utf-8"?>
+<file path=ppt/ink/ink63.xml><?xml version="1.0" encoding="utf-8"?>
 <inkml:ink xmlns:inkml="http://www.w3.org/2003/InkML">
   <inkml:definitions>
     <inkml:context xml:id="ctx0">
@@ -2774,7 +2718,7 @@
 </inkml:ink>
 </file>
 
-<file path=ppt/ink/ink65.xml><?xml version="1.0" encoding="utf-8"?>
+<file path=ppt/ink/ink64.xml><?xml version="1.0" encoding="utf-8"?>
 <inkml:ink xmlns:inkml="http://www.w3.org/2003/InkML">
   <inkml:definitions>
     <inkml:context xml:id="ctx0">
@@ -2802,7 +2746,7 @@
 </inkml:ink>
 </file>
 
-<file path=ppt/ink/ink66.xml><?xml version="1.0" encoding="utf-8"?>
+<file path=ppt/ink/ink65.xml><?xml version="1.0" encoding="utf-8"?>
 <inkml:ink xmlns:inkml="http://www.w3.org/2003/InkML">
   <inkml:definitions>
     <inkml:context xml:id="ctx0">
@@ -2830,7 +2774,7 @@
 </inkml:ink>
 </file>
 
-<file path=ppt/ink/ink67.xml><?xml version="1.0" encoding="utf-8"?>
+<file path=ppt/ink/ink66.xml><?xml version="1.0" encoding="utf-8"?>
 <inkml:ink xmlns:inkml="http://www.w3.org/2003/InkML">
   <inkml:definitions>
     <inkml:context xml:id="ctx0">
@@ -2858,7 +2802,7 @@
 </inkml:ink>
 </file>
 
-<file path=ppt/ink/ink68.xml><?xml version="1.0" encoding="utf-8"?>
+<file path=ppt/ink/ink67.xml><?xml version="1.0" encoding="utf-8"?>
 <inkml:ink xmlns:inkml="http://www.w3.org/2003/InkML">
   <inkml:definitions>
     <inkml:context xml:id="ctx0">
@@ -2886,7 +2830,7 @@
 </inkml:ink>
 </file>
 
-<file path=ppt/ink/ink69.xml><?xml version="1.0" encoding="utf-8"?>
+<file path=ppt/ink/ink68.xml><?xml version="1.0" encoding="utf-8"?>
 <inkml:ink xmlns:inkml="http://www.w3.org/2003/InkML">
   <inkml:definitions>
     <inkml:context xml:id="ctx0">
@@ -2914,35 +2858,7 @@
 </inkml:ink>
 </file>
 
-<file path=ppt/ink/ink7.xml><?xml version="1.0" encoding="utf-8"?>
-<inkml:ink xmlns:inkml="http://www.w3.org/2003/InkML">
-  <inkml:definitions>
-    <inkml:context xml:id="ctx0">
-      <inkml:inkSource xml:id="inkSrc0">
-        <inkml:traceFormat>
-          <inkml:channel name="X" type="integer" min="-2.14748E9" max="2.14748E9" units="cm"/>
-          <inkml:channel name="Y" type="integer" min="-2.14748E9" max="2.14748E9" units="cm"/>
-          <inkml:channel name="F" type="integer" max="32767" units="dev"/>
-        </inkml:traceFormat>
-        <inkml:channelProperties>
-          <inkml:channelProperty channel="X" name="resolution" value="1000" units="1/cm"/>
-          <inkml:channelProperty channel="Y" name="resolution" value="1000" units="1/cm"/>
-          <inkml:channelProperty channel="F" name="resolution" value="0" units="1/dev"/>
-        </inkml:channelProperties>
-      </inkml:inkSource>
-      <inkml:timestamp xml:id="ts0" timeString="2026-03-29T19:18:19.777"/>
-    </inkml:context>
-    <inkml:brush xml:id="br0">
-      <inkml:brushProperty name="width" value="0.025" units="cm"/>
-      <inkml:brushProperty name="height" value="0.025" units="cm"/>
-      <inkml:brushProperty name="color" value="#E71224"/>
-    </inkml:brush>
-  </inkml:definitions>
-  <inkml:trace contextRef="#ctx0" brushRef="#br0">0 0 23609,'5195'0'0</inkml:trace>
-</inkml:ink>
-</file>
-
-<file path=ppt/ink/ink70.xml><?xml version="1.0" encoding="utf-8"?>
+<file path=ppt/ink/ink69.xml><?xml version="1.0" encoding="utf-8"?>
 <inkml:ink xmlns:inkml="http://www.w3.org/2003/InkML">
   <inkml:definitions>
     <inkml:context xml:id="ctx0">
@@ -2970,7 +2886,35 @@
 </inkml:ink>
 </file>
 
-<file path=ppt/ink/ink71.xml><?xml version="1.0" encoding="utf-8"?>
+<file path=ppt/ink/ink7.xml><?xml version="1.0" encoding="utf-8"?>
+<inkml:ink xmlns:inkml="http://www.w3.org/2003/InkML">
+  <inkml:definitions>
+    <inkml:context xml:id="ctx0">
+      <inkml:inkSource xml:id="inkSrc0">
+        <inkml:traceFormat>
+          <inkml:channel name="X" type="integer" min="-2.14748E9" max="2.14748E9" units="cm"/>
+          <inkml:channel name="Y" type="integer" min="-2.14748E9" max="2.14748E9" units="cm"/>
+          <inkml:channel name="F" type="integer" max="32767" units="dev"/>
+        </inkml:traceFormat>
+        <inkml:channelProperties>
+          <inkml:channelProperty channel="X" name="resolution" value="1000" units="1/cm"/>
+          <inkml:channelProperty channel="Y" name="resolution" value="1000" units="1/cm"/>
+          <inkml:channelProperty channel="F" name="resolution" value="0" units="1/dev"/>
+        </inkml:channelProperties>
+      </inkml:inkSource>
+      <inkml:timestamp xml:id="ts0" timeString="2026-03-29T19:13:07.782"/>
+    </inkml:context>
+    <inkml:brush xml:id="br0">
+      <inkml:brushProperty name="width" value="0.025" units="cm"/>
+      <inkml:brushProperty name="height" value="0.025" units="cm"/>
+      <inkml:brushProperty name="color" value="#E71224"/>
+    </inkml:brush>
+  </inkml:definitions>
+  <inkml:trace contextRef="#ctx0" brushRef="#br0">1 1 24575,'251'12'0,"-48"-1"0,494-7-33,-439-5-1299,-233 1-5494</inkml:trace>
+</inkml:ink>
+</file>
+
+<file path=ppt/ink/ink70.xml><?xml version="1.0" encoding="utf-8"?>
 <inkml:ink xmlns:inkml="http://www.w3.org/2003/InkML">
   <inkml:definitions>
     <inkml:context xml:id="ctx0">
@@ -2998,7 +2942,7 @@
 </inkml:ink>
 </file>
 
-<file path=ppt/ink/ink72.xml><?xml version="1.0" encoding="utf-8"?>
+<file path=ppt/ink/ink71.xml><?xml version="1.0" encoding="utf-8"?>
 <inkml:ink xmlns:inkml="http://www.w3.org/2003/InkML">
   <inkml:definitions>
     <inkml:context xml:id="ctx0">
@@ -3026,7 +2970,7 @@
 </inkml:ink>
 </file>
 
-<file path=ppt/ink/ink73.xml><?xml version="1.0" encoding="utf-8"?>
+<file path=ppt/ink/ink72.xml><?xml version="1.0" encoding="utf-8"?>
 <inkml:ink xmlns:inkml="http://www.w3.org/2003/InkML">
   <inkml:definitions>
     <inkml:context xml:id="ctx0">
@@ -3054,7 +2998,7 @@
 </inkml:ink>
 </file>
 
-<file path=ppt/ink/ink74.xml><?xml version="1.0" encoding="utf-8"?>
+<file path=ppt/ink/ink73.xml><?xml version="1.0" encoding="utf-8"?>
 <inkml:ink xmlns:inkml="http://www.w3.org/2003/InkML">
   <inkml:definitions>
     <inkml:context xml:id="ctx0">
@@ -3082,7 +3026,7 @@
 </inkml:ink>
 </file>
 
-<file path=ppt/ink/ink75.xml><?xml version="1.0" encoding="utf-8"?>
+<file path=ppt/ink/ink74.xml><?xml version="1.0" encoding="utf-8"?>
 <inkml:ink xmlns:inkml="http://www.w3.org/2003/InkML">
   <inkml:definitions>
     <inkml:context xml:id="ctx0">
@@ -3110,7 +3054,7 @@
 </inkml:ink>
 </file>
 
-<file path=ppt/ink/ink76.xml><?xml version="1.0" encoding="utf-8"?>
+<file path=ppt/ink/ink75.xml><?xml version="1.0" encoding="utf-8"?>
 <inkml:ink xmlns:inkml="http://www.w3.org/2003/InkML">
   <inkml:definitions>
     <inkml:context xml:id="ctx0">
@@ -3138,7 +3082,7 @@
 </inkml:ink>
 </file>
 
-<file path=ppt/ink/ink77.xml><?xml version="1.0" encoding="utf-8"?>
+<file path=ppt/ink/ink76.xml><?xml version="1.0" encoding="utf-8"?>
 <inkml:ink xmlns:inkml="http://www.w3.org/2003/InkML">
   <inkml:definitions>
     <inkml:context xml:id="ctx0">
@@ -3166,7 +3110,7 @@
 </inkml:ink>
 </file>
 
-<file path=ppt/ink/ink78.xml><?xml version="1.0" encoding="utf-8"?>
+<file path=ppt/ink/ink77.xml><?xml version="1.0" encoding="utf-8"?>
 <inkml:ink xmlns:inkml="http://www.w3.org/2003/InkML">
   <inkml:definitions>
     <inkml:context xml:id="ctx0">
@@ -3194,7 +3138,7 @@
 </inkml:ink>
 </file>
 
-<file path=ppt/ink/ink79.xml><?xml version="1.0" encoding="utf-8"?>
+<file path=ppt/ink/ink78.xml><?xml version="1.0" encoding="utf-8"?>
 <inkml:ink xmlns:inkml="http://www.w3.org/2003/InkML">
   <inkml:definitions>
     <inkml:context xml:id="ctx0">
@@ -3222,35 +3166,7 @@
 </inkml:ink>
 </file>
 
-<file path=ppt/ink/ink8.xml><?xml version="1.0" encoding="utf-8"?>
-<inkml:ink xmlns:inkml="http://www.w3.org/2003/InkML">
-  <inkml:definitions>
-    <inkml:context xml:id="ctx0">
-      <inkml:inkSource xml:id="inkSrc0">
-        <inkml:traceFormat>
-          <inkml:channel name="X" type="integer" min="-2.14748E9" max="2.14748E9" units="cm"/>
-          <inkml:channel name="Y" type="integer" min="-2.14748E9" max="2.14748E9" units="cm"/>
-          <inkml:channel name="F" type="integer" max="32767" units="dev"/>
-        </inkml:traceFormat>
-        <inkml:channelProperties>
-          <inkml:channelProperty channel="X" name="resolution" value="1000" units="1/cm"/>
-          <inkml:channelProperty channel="Y" name="resolution" value="1000" units="1/cm"/>
-          <inkml:channelProperty channel="F" name="resolution" value="0" units="1/dev"/>
-        </inkml:channelProperties>
-      </inkml:inkSource>
-      <inkml:timestamp xml:id="ts0" timeString="2026-03-29T19:13:07.782"/>
-    </inkml:context>
-    <inkml:brush xml:id="br0">
-      <inkml:brushProperty name="width" value="0.025" units="cm"/>
-      <inkml:brushProperty name="height" value="0.025" units="cm"/>
-      <inkml:brushProperty name="color" value="#E71224"/>
-    </inkml:brush>
-  </inkml:definitions>
-  <inkml:trace contextRef="#ctx0" brushRef="#br0">1 1 24575,'251'12'0,"-48"-1"0,494-7-33,-439-5-1299,-233 1-5494</inkml:trace>
-</inkml:ink>
-</file>
-
-<file path=ppt/ink/ink80.xml><?xml version="1.0" encoding="utf-8"?>
+<file path=ppt/ink/ink79.xml><?xml version="1.0" encoding="utf-8"?>
 <inkml:ink xmlns:inkml="http://www.w3.org/2003/InkML">
   <inkml:definitions>
     <inkml:context xml:id="ctx0">
@@ -3278,7 +3194,35 @@
 </inkml:ink>
 </file>
 
-<file path=ppt/ink/ink81.xml><?xml version="1.0" encoding="utf-8"?>
+<file path=ppt/ink/ink8.xml><?xml version="1.0" encoding="utf-8"?>
+<inkml:ink xmlns:inkml="http://www.w3.org/2003/InkML">
+  <inkml:definitions>
+    <inkml:context xml:id="ctx0">
+      <inkml:inkSource xml:id="inkSrc0">
+        <inkml:traceFormat>
+          <inkml:channel name="X" type="integer" min="-2.14748E9" max="2.14748E9" units="cm"/>
+          <inkml:channel name="Y" type="integer" min="-2.14748E9" max="2.14748E9" units="cm"/>
+          <inkml:channel name="F" type="integer" max="32767" units="dev"/>
+        </inkml:traceFormat>
+        <inkml:channelProperties>
+          <inkml:channelProperty channel="X" name="resolution" value="1000" units="1/cm"/>
+          <inkml:channelProperty channel="Y" name="resolution" value="1000" units="1/cm"/>
+          <inkml:channelProperty channel="F" name="resolution" value="0" units="1/dev"/>
+        </inkml:channelProperties>
+      </inkml:inkSource>
+      <inkml:timestamp xml:id="ts0" timeString="2026-03-29T19:13:10.314"/>
+    </inkml:context>
+    <inkml:brush xml:id="br0">
+      <inkml:brushProperty name="width" value="0.025" units="cm"/>
+      <inkml:brushProperty name="height" value="0.025" units="cm"/>
+      <inkml:brushProperty name="color" value="#E71224"/>
+    </inkml:brush>
+  </inkml:definitions>
+  <inkml:trace contextRef="#ctx0" brushRef="#br0">0 27 24575,'287'2'0,"297"-4"0,-392-11 0,46-1 0,508 15-1365,-738-1-5461</inkml:trace>
+</inkml:ink>
+</file>
+
+<file path=ppt/ink/ink80.xml><?xml version="1.0" encoding="utf-8"?>
 <inkml:ink xmlns:inkml="http://www.w3.org/2003/InkML">
   <inkml:definitions>
     <inkml:context xml:id="ctx0">
@@ -3306,7 +3250,7 @@
 </inkml:ink>
 </file>
 
-<file path=ppt/ink/ink82.xml><?xml version="1.0" encoding="utf-8"?>
+<file path=ppt/ink/ink81.xml><?xml version="1.0" encoding="utf-8"?>
 <inkml:ink xmlns:inkml="http://www.w3.org/2003/InkML">
   <inkml:definitions>
     <inkml:context xml:id="ctx0">
@@ -3334,7 +3278,7 @@
 </inkml:ink>
 </file>
 
-<file path=ppt/ink/ink83.xml><?xml version="1.0" encoding="utf-8"?>
+<file path=ppt/ink/ink82.xml><?xml version="1.0" encoding="utf-8"?>
 <inkml:ink xmlns:inkml="http://www.w3.org/2003/InkML">
   <inkml:definitions>
     <inkml:context xml:id="ctx0">
@@ -3362,7 +3306,7 @@
 </inkml:ink>
 </file>
 
-<file path=ppt/ink/ink84.xml><?xml version="1.0" encoding="utf-8"?>
+<file path=ppt/ink/ink83.xml><?xml version="1.0" encoding="utf-8"?>
 <inkml:ink xmlns:inkml="http://www.w3.org/2003/InkML">
   <inkml:definitions>
     <inkml:context xml:id="ctx0">
@@ -3390,7 +3334,7 @@
 </inkml:ink>
 </file>
 
-<file path=ppt/ink/ink85.xml><?xml version="1.0" encoding="utf-8"?>
+<file path=ppt/ink/ink84.xml><?xml version="1.0" encoding="utf-8"?>
 <inkml:ink xmlns:inkml="http://www.w3.org/2003/InkML">
   <inkml:definitions>
     <inkml:context xml:id="ctx0">
@@ -3418,7 +3362,7 @@
 </inkml:ink>
 </file>
 
-<file path=ppt/ink/ink86.xml><?xml version="1.0" encoding="utf-8"?>
+<file path=ppt/ink/ink85.xml><?xml version="1.0" encoding="utf-8"?>
 <inkml:ink xmlns:inkml="http://www.w3.org/2003/InkML">
   <inkml:definitions>
     <inkml:context xml:id="ctx0">
@@ -3446,7 +3390,7 @@
 </inkml:ink>
 </file>
 
-<file path=ppt/ink/ink87.xml><?xml version="1.0" encoding="utf-8"?>
+<file path=ppt/ink/ink86.xml><?xml version="1.0" encoding="utf-8"?>
 <inkml:ink xmlns:inkml="http://www.w3.org/2003/InkML">
   <inkml:definitions>
     <inkml:context xml:id="ctx0">
@@ -3474,7 +3418,7 @@
 </inkml:ink>
 </file>
 
-<file path=ppt/ink/ink88.xml><?xml version="1.0" encoding="utf-8"?>
+<file path=ppt/ink/ink87.xml><?xml version="1.0" encoding="utf-8"?>
 <inkml:ink xmlns:inkml="http://www.w3.org/2003/InkML">
   <inkml:definitions>
     <inkml:context xml:id="ctx0">
@@ -3502,7 +3446,7 @@
 </inkml:ink>
 </file>
 
-<file path=ppt/ink/ink89.xml><?xml version="1.0" encoding="utf-8"?>
+<file path=ppt/ink/ink88.xml><?xml version="1.0" encoding="utf-8"?>
 <inkml:ink xmlns:inkml="http://www.w3.org/2003/InkML">
   <inkml:definitions>
     <inkml:context xml:id="ctx0">
@@ -3530,35 +3474,7 @@
 </inkml:ink>
 </file>
 
-<file path=ppt/ink/ink9.xml><?xml version="1.0" encoding="utf-8"?>
-<inkml:ink xmlns:inkml="http://www.w3.org/2003/InkML">
-  <inkml:definitions>
-    <inkml:context xml:id="ctx0">
-      <inkml:inkSource xml:id="inkSrc0">
-        <inkml:traceFormat>
-          <inkml:channel name="X" type="integer" min="-2.14748E9" max="2.14748E9" units="cm"/>
-          <inkml:channel name="Y" type="integer" min="-2.14748E9" max="2.14748E9" units="cm"/>
-          <inkml:channel name="F" type="integer" max="32767" units="dev"/>
-        </inkml:traceFormat>
-        <inkml:channelProperties>
-          <inkml:channelProperty channel="X" name="resolution" value="1000" units="1/cm"/>
-          <inkml:channelProperty channel="Y" name="resolution" value="1000" units="1/cm"/>
-          <inkml:channelProperty channel="F" name="resolution" value="0" units="1/dev"/>
-        </inkml:channelProperties>
-      </inkml:inkSource>
-      <inkml:timestamp xml:id="ts0" timeString="2026-03-29T19:13:10.314"/>
-    </inkml:context>
-    <inkml:brush xml:id="br0">
-      <inkml:brushProperty name="width" value="0.025" units="cm"/>
-      <inkml:brushProperty name="height" value="0.025" units="cm"/>
-      <inkml:brushProperty name="color" value="#E71224"/>
-    </inkml:brush>
-  </inkml:definitions>
-  <inkml:trace contextRef="#ctx0" brushRef="#br0">0 27 24575,'287'2'0,"297"-4"0,-392-11 0,46-1 0,508 15-1365,-738-1-5461</inkml:trace>
-</inkml:ink>
-</file>
-
-<file path=ppt/ink/ink90.xml><?xml version="1.0" encoding="utf-8"?>
+<file path=ppt/ink/ink89.xml><?xml version="1.0" encoding="utf-8"?>
 <inkml:ink xmlns:inkml="http://www.w3.org/2003/InkML">
   <inkml:definitions>
     <inkml:context xml:id="ctx0">
@@ -3586,7 +3502,35 @@
 </inkml:ink>
 </file>
 
-<file path=ppt/ink/ink91.xml><?xml version="1.0" encoding="utf-8"?>
+<file path=ppt/ink/ink9.xml><?xml version="1.0" encoding="utf-8"?>
+<inkml:ink xmlns:inkml="http://www.w3.org/2003/InkML">
+  <inkml:definitions>
+    <inkml:context xml:id="ctx0">
+      <inkml:inkSource xml:id="inkSrc0">
+        <inkml:traceFormat>
+          <inkml:channel name="X" type="integer" min="-2.14748E9" max="2.14748E9" units="cm"/>
+          <inkml:channel name="Y" type="integer" min="-2.14748E9" max="2.14748E9" units="cm"/>
+          <inkml:channel name="F" type="integer" max="32767" units="dev"/>
+        </inkml:traceFormat>
+        <inkml:channelProperties>
+          <inkml:channelProperty channel="X" name="resolution" value="1000" units="1/cm"/>
+          <inkml:channelProperty channel="Y" name="resolution" value="1000" units="1/cm"/>
+          <inkml:channelProperty channel="F" name="resolution" value="0" units="1/dev"/>
+        </inkml:channelProperties>
+      </inkml:inkSource>
+      <inkml:timestamp xml:id="ts0" timeString="2026-03-29T19:13:11.990"/>
+    </inkml:context>
+    <inkml:brush xml:id="br0">
+      <inkml:brushProperty name="width" value="0.025" units="cm"/>
+      <inkml:brushProperty name="height" value="0.025" units="cm"/>
+      <inkml:brushProperty name="color" value="#E71224"/>
+    </inkml:brush>
+  </inkml:definitions>
+  <inkml:trace contextRef="#ctx0" brushRef="#br0">0 1 24575,'4'5'0,"-1"-1"0,0 1 0,1-1 0,0 0 0,0 0 0,1 0 0,-1 0 0,1-1 0,-1 0 0,1 0 0,0 0 0,8 3 0,65 22 0,6-10 0,0-4 0,1-3 0,149-1 0,2 0 0,475 19 0,-113-9 0,-5-9-224,-444-11-917,-137 0-5685</inkml:trace>
+</inkml:ink>
+</file>
+
+<file path=ppt/ink/ink90.xml><?xml version="1.0" encoding="utf-8"?>
 <inkml:ink xmlns:inkml="http://www.w3.org/2003/InkML">
   <inkml:definitions>
     <inkml:context xml:id="ctx0">
@@ -3614,7 +3558,7 @@
 </inkml:ink>
 </file>
 
-<file path=ppt/ink/ink92.xml><?xml version="1.0" encoding="utf-8"?>
+<file path=ppt/ink/ink91.xml><?xml version="1.0" encoding="utf-8"?>
 <inkml:ink xmlns:inkml="http://www.w3.org/2003/InkML">
   <inkml:definitions>
     <inkml:context xml:id="ctx0">
@@ -3642,7 +3586,7 @@
 </inkml:ink>
 </file>
 
-<file path=ppt/ink/ink93.xml><?xml version="1.0" encoding="utf-8"?>
+<file path=ppt/ink/ink92.xml><?xml version="1.0" encoding="utf-8"?>
 <inkml:ink xmlns:inkml="http://www.w3.org/2003/InkML">
   <inkml:definitions>
     <inkml:context xml:id="ctx0">
@@ -3670,7 +3614,7 @@
 </inkml:ink>
 </file>
 
-<file path=ppt/ink/ink94.xml><?xml version="1.0" encoding="utf-8"?>
+<file path=ppt/ink/ink93.xml><?xml version="1.0" encoding="utf-8"?>
 <inkml:ink xmlns:inkml="http://www.w3.org/2003/InkML">
   <inkml:definitions>
     <inkml:context xml:id="ctx0">
@@ -3698,7 +3642,7 @@
 </inkml:ink>
 </file>
 
-<file path=ppt/ink/ink95.xml><?xml version="1.0" encoding="utf-8"?>
+<file path=ppt/ink/ink94.xml><?xml version="1.0" encoding="utf-8"?>
 <inkml:ink xmlns:inkml="http://www.w3.org/2003/InkML">
   <inkml:definitions>
     <inkml:context xml:id="ctx0">
@@ -3726,7 +3670,7 @@
 </inkml:ink>
 </file>
 
-<file path=ppt/ink/ink96.xml><?xml version="1.0" encoding="utf-8"?>
+<file path=ppt/ink/ink95.xml><?xml version="1.0" encoding="utf-8"?>
 <inkml:ink xmlns:inkml="http://www.w3.org/2003/InkML">
   <inkml:definitions>
     <inkml:context xml:id="ctx0">
@@ -3754,7 +3698,7 @@
 </inkml:ink>
 </file>
 
-<file path=ppt/ink/ink97.xml><?xml version="1.0" encoding="utf-8"?>
+<file path=ppt/ink/ink96.xml><?xml version="1.0" encoding="utf-8"?>
 <inkml:ink xmlns:inkml="http://www.w3.org/2003/InkML">
   <inkml:definitions>
     <inkml:context xml:id="ctx0">
@@ -3782,7 +3726,7 @@
 </inkml:ink>
 </file>
 
-<file path=ppt/ink/ink98.xml><?xml version="1.0" encoding="utf-8"?>
+<file path=ppt/ink/ink97.xml><?xml version="1.0" encoding="utf-8"?>
 <inkml:ink xmlns:inkml="http://www.w3.org/2003/InkML">
   <inkml:definitions>
     <inkml:context xml:id="ctx0">
@@ -3810,7 +3754,7 @@
 </inkml:ink>
 </file>
 
-<file path=ppt/ink/ink99.xml><?xml version="1.0" encoding="utf-8"?>
+<file path=ppt/ink/ink98.xml><?xml version="1.0" encoding="utf-8"?>
 <inkml:ink xmlns:inkml="http://www.w3.org/2003/InkML">
   <inkml:definitions>
     <inkml:context xml:id="ctx0">
@@ -3835,6 +3779,34 @@
     </inkml:brush>
   </inkml:definitions>
   <inkml:trace contextRef="#ctx0" brushRef="#br0">0 0 23841,'2077'27'0</inkml:trace>
+</inkml:ink>
+</file>
+
+<file path=ppt/ink/ink99.xml><?xml version="1.0" encoding="utf-8"?>
+<inkml:ink xmlns:inkml="http://www.w3.org/2003/InkML">
+  <inkml:definitions>
+    <inkml:context xml:id="ctx0">
+      <inkml:inkSource xml:id="inkSrc0">
+        <inkml:traceFormat>
+          <inkml:channel name="X" type="integer" min="-2.14748E9" max="2.14748E9" units="cm"/>
+          <inkml:channel name="Y" type="integer" min="-2.14748E9" max="2.14748E9" units="cm"/>
+          <inkml:channel name="F" type="integer" max="32767" units="dev"/>
+        </inkml:traceFormat>
+        <inkml:channelProperties>
+          <inkml:channelProperty channel="X" name="resolution" value="1000" units="1/cm"/>
+          <inkml:channelProperty channel="Y" name="resolution" value="1000" units="1/cm"/>
+          <inkml:channelProperty channel="F" name="resolution" value="0" units="1/dev"/>
+        </inkml:channelProperties>
+      </inkml:inkSource>
+      <inkml:timestamp xml:id="ts0" timeString="2026-03-29T20:17:47.809"/>
+    </inkml:context>
+    <inkml:brush xml:id="br0">
+      <inkml:brushProperty name="width" value="0.025" units="cm"/>
+      <inkml:brushProperty name="height" value="0.025" units="cm"/>
+      <inkml:brushProperty name="color" value="#E71224"/>
+    </inkml:brush>
+  </inkml:definitions>
+  <inkml:trace contextRef="#ctx0" brushRef="#br0">0 0 22663,'1084'26'0</inkml:trace>
 </inkml:ink>
 </file>
 
@@ -4257,96 +4229,6 @@
           </a:p>
         </p:txBody>
       </p:sp>
-      <mc:AlternateContent xmlns:mc="http://schemas.openxmlformats.org/markup-compatibility/2006" xmlns:p14="http://schemas.microsoft.com/office/powerpoint/2010/main">
-        <mc:Choice Requires="p14">
-          <p:contentPart p14:bwMode="auto" r:id="rId9">
-            <p14:nvContentPartPr>
-              <p14:cNvPr id="29" name="Ink 28">
-                <a:extLst>
-                  <a:ext uri="{FF2B5EF4-FFF2-40B4-BE49-F238E27FC236}">
-                    <a16:creationId xmlns:a16="http://schemas.microsoft.com/office/drawing/2014/main" id="{576A881D-511D-FA3A-6F4B-05D584DE9612}"/>
-                  </a:ext>
-                </a:extLst>
-              </p14:cNvPr>
-              <p14:cNvContentPartPr/>
-              <p14:nvPr/>
-            </p14:nvContentPartPr>
-            <p14:xfrm>
-              <a:off x="5165445" y="676325"/>
-              <a:ext cx="171360" cy="6480"/>
-            </p14:xfrm>
-          </p:contentPart>
-        </mc:Choice>
-        <mc:Fallback xmlns="">
-          <p:pic>
-            <p:nvPicPr>
-              <p:cNvPr id="29" name="Ink 28">
-                <a:extLst>
-                  <a:ext uri="{FF2B5EF4-FFF2-40B4-BE49-F238E27FC236}">
-                    <a16:creationId xmlns:a16="http://schemas.microsoft.com/office/drawing/2014/main" id="{576A881D-511D-FA3A-6F4B-05D584DE9612}"/>
-                  </a:ext>
-                </a:extLst>
-              </p:cNvPr>
-              <p:cNvPicPr/>
-              <p:nvPr/>
-            </p:nvPicPr>
-            <p:blipFill>
-              <a:blip r:embed="rId10"/>
-              <a:stretch>
-                <a:fillRect/>
-              </a:stretch>
-            </p:blipFill>
-            <p:spPr>
-              <a:xfrm>
-                <a:off x="5161125" y="672005"/>
-                <a:ext cx="180000" cy="15120"/>
-              </a:xfrm>
-              <a:prstGeom prst="rect">
-                <a:avLst/>
-              </a:prstGeom>
-            </p:spPr>
-          </p:pic>
-        </mc:Fallback>
-      </mc:AlternateContent>
-      <p:sp>
-        <p:nvSpPr>
-          <p:cNvPr id="30" name="TextBox 29">
-            <a:extLst>
-              <a:ext uri="{FF2B5EF4-FFF2-40B4-BE49-F238E27FC236}">
-                <a16:creationId xmlns:a16="http://schemas.microsoft.com/office/drawing/2014/main" id="{0576E9C3-937C-D0F3-7FA9-C7D61BF79994}"/>
-              </a:ext>
-            </a:extLst>
-          </p:cNvPr>
-          <p:cNvSpPr txBox="1"/>
-          <p:nvPr/>
-        </p:nvSpPr>
-        <p:spPr>
-          <a:xfrm>
-            <a:off x="5046669" y="461805"/>
-            <a:ext cx="1349901" cy="200055"/>
-          </a:xfrm>
-          <a:prstGeom prst="rect">
-            <a:avLst/>
-          </a:prstGeom>
-          <a:noFill/>
-        </p:spPr>
-        <p:txBody>
-          <a:bodyPr wrap="square" rtlCol="0">
-            <a:spAutoFit/>
-          </a:bodyPr>
-          <a:lstStyle/>
-          <a:p>
-            <a:r>
-              <a:rPr lang="en-US" sz="700" dirty="0">
-                <a:solidFill>
-                  <a:srgbClr val="FF0000"/>
-                </a:solidFill>
-              </a:rPr>
-              <a:t>Is that </a:t>
-            </a:r>
-          </a:p>
-        </p:txBody>
-      </p:sp>
       <p:sp>
         <p:nvSpPr>
           <p:cNvPr id="34" name="TextBox 33">
@@ -4388,7 +4270,7 @@
       </p:sp>
       <mc:AlternateContent xmlns:mc="http://schemas.openxmlformats.org/markup-compatibility/2006" xmlns:p14="http://schemas.microsoft.com/office/powerpoint/2010/main">
         <mc:Choice Requires="p14">
-          <p:contentPart p14:bwMode="auto" r:id="rId11">
+          <p:contentPart p14:bwMode="auto" r:id="rId9">
             <p14:nvContentPartPr>
               <p14:cNvPr id="35" name="Ink 34">
                 <a:extLst>
